--- a/data/FF/FF43.pptx
+++ b/data/FF/FF43.pptx
@@ -5,17 +5,16 @@
     <p:sldMasterId id="2147483648" r:id="rId1"/>
   </p:sldMasterIdLst>
   <p:sldIdLst>
-    <p:sldId id="256" r:id="rId2"/>
-    <p:sldId id="257" r:id="rId3"/>
-    <p:sldId id="258" r:id="rId4"/>
-    <p:sldId id="259" r:id="rId5"/>
-    <p:sldId id="260" r:id="rId6"/>
+    <p:sldId id="256" r:id="rId6"/>
+    <p:sldId id="257" r:id="rId7"/>
+    <p:sldId id="258" r:id="rId8"/>
+    <p:sldId id="259" r:id="rId9"/>
   </p:sldIdLst>
-  <p:sldSz cx="9144000" cy="6858000" type="screen4x3"/>
+  <p:sldSz cx="12192000" cy="6858000"/>
   <p:notesSz cx="6858000" cy="9144000"/>
   <p:defaultTextStyle>
     <a:defPPr>
-      <a:defRPr lang="fr-FR"/>
+      <a:defRPr lang="en-US"/>
     </a:defPPr>
     <a:lvl1pPr marL="0" algn="l" defTabSz="914400" rtl="0" eaLnBrk="1" latinLnBrk="0" hangingPunct="1">
       <a:defRPr sz="1800" kern="1200">
@@ -113,7 +112,7 @@
 
 <file path=ppt/slideLayouts/slideLayout1.xml><?xml version="1.0" encoding="utf-8"?>
 <p:sldLayout xmlns:a="http://schemas.openxmlformats.org/drawingml/2006/main" xmlns:r="http://schemas.openxmlformats.org/officeDocument/2006/relationships" xmlns:p="http://schemas.openxmlformats.org/presentationml/2006/main" type="title" preserve="1">
-  <p:cSld name="Diapositive de titre">
+  <p:cSld name="Title Slide">
     <p:spTree>
       <p:nvGrpSpPr>
         <p:cNvPr id="1" name=""/>
@@ -130,7 +129,7 @@
       </p:grpSpPr>
       <p:sp>
         <p:nvSpPr>
-          <p:cNvPr id="2" name="Titre 1"/>
+          <p:cNvPr id="2" name="Title 1"/>
           <p:cNvSpPr>
             <a:spLocks noGrp="1"/>
           </p:cNvSpPr>
@@ -149,16 +148,16 @@
           <a:lstStyle/>
           <a:p>
             <a:r>
-              <a:rPr lang="fr-FR" smtClean="0"/>
-              <a:t>Modifiez le style du titre</a:t>
-            </a:r>
-            <a:endParaRPr lang="fr-FR"/>
-          </a:p>
-        </p:txBody>
-      </p:sp>
-      <p:sp>
-        <p:nvSpPr>
-          <p:cNvPr id="3" name="Sous-titre 2"/>
+              <a:rPr lang="en-US" smtClean="0"/>
+              <a:t>Click to edit Master title style</a:t>
+            </a:r>
+            <a:endParaRPr lang="en-US"/>
+          </a:p>
+        </p:txBody>
+      </p:sp>
+      <p:sp>
+        <p:nvSpPr>
+          <p:cNvPr id="3" name="Subtitle 2"/>
           <p:cNvSpPr>
             <a:spLocks noGrp="1"/>
           </p:cNvSpPr>
@@ -268,16 +267,16 @@
           </a:lstStyle>
           <a:p>
             <a:r>
-              <a:rPr lang="fr-FR" smtClean="0"/>
-              <a:t>Modifiez le style des sous-titres du masque</a:t>
-            </a:r>
-            <a:endParaRPr lang="fr-FR"/>
-          </a:p>
-        </p:txBody>
-      </p:sp>
-      <p:sp>
-        <p:nvSpPr>
-          <p:cNvPr id="4" name="Espace réservé de la date 3"/>
+              <a:rPr lang="en-US" smtClean="0"/>
+              <a:t>Click to edit Master subtitle style</a:t>
+            </a:r>
+            <a:endParaRPr lang="en-US"/>
+          </a:p>
+        </p:txBody>
+      </p:sp>
+      <p:sp>
+        <p:nvSpPr>
+          <p:cNvPr id="4" name="Date Placeholder 3"/>
           <p:cNvSpPr>
             <a:spLocks noGrp="1"/>
           </p:cNvSpPr>
@@ -290,17 +289,18 @@
           <a:bodyPr/>
           <a:lstStyle/>
           <a:p>
-            <a:fld id="{ACEF5093-F78E-4C54-92B5-273C64AB824F}" type="datetimeFigureOut">
-              <a:rPr lang="fr-FR" smtClean="0"/>
-              <a:t>13/11/2012</a:t>
+            <a:fld id="{1D8BD707-D9CF-40AE-B4C6-C98DA3205C09}" type="datetimeFigureOut">
+              <a:rPr lang="en-US" smtClean="0"/>
+              <a:pPr/>
+              <a:t>8/1/2011</a:t>
             </a:fld>
-            <a:endParaRPr lang="fr-FR"/>
-          </a:p>
-        </p:txBody>
-      </p:sp>
-      <p:sp>
-        <p:nvSpPr>
-          <p:cNvPr id="5" name="Espace réservé du pied de page 4"/>
+            <a:endParaRPr lang="en-US"/>
+          </a:p>
+        </p:txBody>
+      </p:sp>
+      <p:sp>
+        <p:nvSpPr>
+          <p:cNvPr id="5" name="Footer Placeholder 4"/>
           <p:cNvSpPr>
             <a:spLocks noGrp="1"/>
           </p:cNvSpPr>
@@ -313,13 +313,13 @@
           <a:bodyPr/>
           <a:lstStyle/>
           <a:p>
-            <a:endParaRPr lang="fr-FR"/>
-          </a:p>
-        </p:txBody>
-      </p:sp>
-      <p:sp>
-        <p:nvSpPr>
-          <p:cNvPr id="6" name="Espace réservé du numéro de diapositive 5"/>
+            <a:endParaRPr lang="en-US"/>
+          </a:p>
+        </p:txBody>
+      </p:sp>
+      <p:sp>
+        <p:nvSpPr>
+          <p:cNvPr id="6" name="Slide Number Placeholder 5"/>
           <p:cNvSpPr>
             <a:spLocks noGrp="1"/>
           </p:cNvSpPr>
@@ -332,20 +332,16 @@
           <a:bodyPr/>
           <a:lstStyle/>
           <a:p>
-            <a:fld id="{AB1FBAE0-DF1D-4016-913C-26E4459298C9}" type="slidenum">
-              <a:rPr lang="fr-FR" smtClean="0"/>
-              <a:t>‹N°›</a:t>
+            <a:fld id="{B6F15528-21DE-4FAA-801E-634DDDAF4B2B}" type="slidenum">
+              <a:rPr lang="en-US" smtClean="0"/>
+              <a:pPr/>
+              <a:t>‹#›</a:t>
             </a:fld>
-            <a:endParaRPr lang="fr-FR"/>
+            <a:endParaRPr lang="en-US"/>
           </a:p>
         </p:txBody>
       </p:sp>
     </p:spTree>
-    <p:extLst>
-      <p:ext uri="{BB962C8B-B14F-4D97-AF65-F5344CB8AC3E}">
-        <p14:creationId xmlns:p14="http://schemas.microsoft.com/office/powerpoint/2010/main" val="301110964"/>
-      </p:ext>
-    </p:extLst>
   </p:cSld>
   <p:clrMapOvr>
     <a:masterClrMapping/>
@@ -355,7 +351,7 @@
 
 <file path=ppt/slideLayouts/slideLayout10.xml><?xml version="1.0" encoding="utf-8"?>
 <p:sldLayout xmlns:a="http://schemas.openxmlformats.org/drawingml/2006/main" xmlns:r="http://schemas.openxmlformats.org/officeDocument/2006/relationships" xmlns:p="http://schemas.openxmlformats.org/presentationml/2006/main" type="vertTx" preserve="1">
-  <p:cSld name="Titre et texte vertical">
+  <p:cSld name="Title and Vertical Text">
     <p:spTree>
       <p:nvGrpSpPr>
         <p:cNvPr id="1" name=""/>
@@ -372,7 +368,7 @@
       </p:grpSpPr>
       <p:sp>
         <p:nvSpPr>
-          <p:cNvPr id="2" name="Titre 1"/>
+          <p:cNvPr id="2" name="Title 1"/>
           <p:cNvSpPr>
             <a:spLocks noGrp="1"/>
           </p:cNvSpPr>
@@ -386,16 +382,16 @@
           <a:lstStyle/>
           <a:p>
             <a:r>
-              <a:rPr lang="fr-FR" smtClean="0"/>
-              <a:t>Modifiez le style du titre</a:t>
-            </a:r>
-            <a:endParaRPr lang="fr-FR"/>
-          </a:p>
-        </p:txBody>
-      </p:sp>
-      <p:sp>
-        <p:nvSpPr>
-          <p:cNvPr id="3" name="Espace réservé du texte vertical 2"/>
+              <a:rPr lang="en-US" smtClean="0"/>
+              <a:t>Click to edit Master title style</a:t>
+            </a:r>
+            <a:endParaRPr lang="en-US"/>
+          </a:p>
+        </p:txBody>
+      </p:sp>
+      <p:sp>
+        <p:nvSpPr>
+          <p:cNvPr id="3" name="Vertical Text Placeholder 2"/>
           <p:cNvSpPr>
             <a:spLocks noGrp="1"/>
           </p:cNvSpPr>
@@ -410,44 +406,44 @@
           <a:p>
             <a:pPr lvl="0"/>
             <a:r>
-              <a:rPr lang="fr-FR" smtClean="0"/>
-              <a:t>Modifiez les styles du texte du masque</a:t>
+              <a:rPr lang="en-US" smtClean="0"/>
+              <a:t>Click to edit Master text styles</a:t>
             </a:r>
           </a:p>
           <a:p>
             <a:pPr lvl="1"/>
             <a:r>
-              <a:rPr lang="fr-FR" smtClean="0"/>
-              <a:t>Deuxième niveau</a:t>
+              <a:rPr lang="en-US" smtClean="0"/>
+              <a:t>Second level</a:t>
             </a:r>
           </a:p>
           <a:p>
             <a:pPr lvl="2"/>
             <a:r>
-              <a:rPr lang="fr-FR" smtClean="0"/>
-              <a:t>Troisième niveau</a:t>
+              <a:rPr lang="en-US" smtClean="0"/>
+              <a:t>Third level</a:t>
             </a:r>
           </a:p>
           <a:p>
             <a:pPr lvl="3"/>
             <a:r>
-              <a:rPr lang="fr-FR" smtClean="0"/>
-              <a:t>Quatrième niveau</a:t>
+              <a:rPr lang="en-US" smtClean="0"/>
+              <a:t>Fourth level</a:t>
             </a:r>
           </a:p>
           <a:p>
             <a:pPr lvl="4"/>
             <a:r>
-              <a:rPr lang="fr-FR" smtClean="0"/>
-              <a:t>Cinquième niveau</a:t>
-            </a:r>
-            <a:endParaRPr lang="fr-FR"/>
-          </a:p>
-        </p:txBody>
-      </p:sp>
-      <p:sp>
-        <p:nvSpPr>
-          <p:cNvPr id="4" name="Espace réservé de la date 3"/>
+              <a:rPr lang="en-US" smtClean="0"/>
+              <a:t>Fifth level</a:t>
+            </a:r>
+            <a:endParaRPr lang="en-US"/>
+          </a:p>
+        </p:txBody>
+      </p:sp>
+      <p:sp>
+        <p:nvSpPr>
+          <p:cNvPr id="4" name="Date Placeholder 3"/>
           <p:cNvSpPr>
             <a:spLocks noGrp="1"/>
           </p:cNvSpPr>
@@ -460,17 +456,18 @@
           <a:bodyPr/>
           <a:lstStyle/>
           <a:p>
-            <a:fld id="{ACEF5093-F78E-4C54-92B5-273C64AB824F}" type="datetimeFigureOut">
-              <a:rPr lang="fr-FR" smtClean="0"/>
-              <a:t>13/11/2012</a:t>
+            <a:fld id="{1D8BD707-D9CF-40AE-B4C6-C98DA3205C09}" type="datetimeFigureOut">
+              <a:rPr lang="en-US" smtClean="0"/>
+              <a:pPr/>
+              <a:t>8/1/2011</a:t>
             </a:fld>
-            <a:endParaRPr lang="fr-FR"/>
-          </a:p>
-        </p:txBody>
-      </p:sp>
-      <p:sp>
-        <p:nvSpPr>
-          <p:cNvPr id="5" name="Espace réservé du pied de page 4"/>
+            <a:endParaRPr lang="en-US"/>
+          </a:p>
+        </p:txBody>
+      </p:sp>
+      <p:sp>
+        <p:nvSpPr>
+          <p:cNvPr id="5" name="Footer Placeholder 4"/>
           <p:cNvSpPr>
             <a:spLocks noGrp="1"/>
           </p:cNvSpPr>
@@ -483,13 +480,13 @@
           <a:bodyPr/>
           <a:lstStyle/>
           <a:p>
-            <a:endParaRPr lang="fr-FR"/>
-          </a:p>
-        </p:txBody>
-      </p:sp>
-      <p:sp>
-        <p:nvSpPr>
-          <p:cNvPr id="6" name="Espace réservé du numéro de diapositive 5"/>
+            <a:endParaRPr lang="en-US"/>
+          </a:p>
+        </p:txBody>
+      </p:sp>
+      <p:sp>
+        <p:nvSpPr>
+          <p:cNvPr id="6" name="Slide Number Placeholder 5"/>
           <p:cNvSpPr>
             <a:spLocks noGrp="1"/>
           </p:cNvSpPr>
@@ -502,20 +499,16 @@
           <a:bodyPr/>
           <a:lstStyle/>
           <a:p>
-            <a:fld id="{AB1FBAE0-DF1D-4016-913C-26E4459298C9}" type="slidenum">
-              <a:rPr lang="fr-FR" smtClean="0"/>
-              <a:t>‹N°›</a:t>
+            <a:fld id="{B6F15528-21DE-4FAA-801E-634DDDAF4B2B}" type="slidenum">
+              <a:rPr lang="en-US" smtClean="0"/>
+              <a:pPr/>
+              <a:t>‹#›</a:t>
             </a:fld>
-            <a:endParaRPr lang="fr-FR"/>
+            <a:endParaRPr lang="en-US"/>
           </a:p>
         </p:txBody>
       </p:sp>
     </p:spTree>
-    <p:extLst>
-      <p:ext uri="{BB962C8B-B14F-4D97-AF65-F5344CB8AC3E}">
-        <p14:creationId xmlns:p14="http://schemas.microsoft.com/office/powerpoint/2010/main" val="2547972266"/>
-      </p:ext>
-    </p:extLst>
   </p:cSld>
   <p:clrMapOvr>
     <a:masterClrMapping/>
@@ -525,7 +518,7 @@
 
 <file path=ppt/slideLayouts/slideLayout11.xml><?xml version="1.0" encoding="utf-8"?>
 <p:sldLayout xmlns:a="http://schemas.openxmlformats.org/drawingml/2006/main" xmlns:r="http://schemas.openxmlformats.org/officeDocument/2006/relationships" xmlns:p="http://schemas.openxmlformats.org/presentationml/2006/main" type="vertTitleAndTx" preserve="1">
-  <p:cSld name="Titre vertical et texte">
+  <p:cSld name="Vertical Title and Text">
     <p:spTree>
       <p:nvGrpSpPr>
         <p:cNvPr id="1" name=""/>
@@ -542,7 +535,7 @@
       </p:grpSpPr>
       <p:sp>
         <p:nvSpPr>
-          <p:cNvPr id="2" name="Titre vertical 1"/>
+          <p:cNvPr id="2" name="Vertical Title 1"/>
           <p:cNvSpPr>
             <a:spLocks noGrp="1"/>
           </p:cNvSpPr>
@@ -561,16 +554,16 @@
           <a:lstStyle/>
           <a:p>
             <a:r>
-              <a:rPr lang="fr-FR" smtClean="0"/>
-              <a:t>Modifiez le style du titre</a:t>
-            </a:r>
-            <a:endParaRPr lang="fr-FR"/>
-          </a:p>
-        </p:txBody>
-      </p:sp>
-      <p:sp>
-        <p:nvSpPr>
-          <p:cNvPr id="3" name="Espace réservé du texte vertical 2"/>
+              <a:rPr lang="en-US" smtClean="0"/>
+              <a:t>Click to edit Master title style</a:t>
+            </a:r>
+            <a:endParaRPr lang="en-US"/>
+          </a:p>
+        </p:txBody>
+      </p:sp>
+      <p:sp>
+        <p:nvSpPr>
+          <p:cNvPr id="3" name="Vertical Text Placeholder 2"/>
           <p:cNvSpPr>
             <a:spLocks noGrp="1"/>
           </p:cNvSpPr>
@@ -590,44 +583,44 @@
           <a:p>
             <a:pPr lvl="0"/>
             <a:r>
-              <a:rPr lang="fr-FR" smtClean="0"/>
-              <a:t>Modifiez les styles du texte du masque</a:t>
+              <a:rPr lang="en-US" smtClean="0"/>
+              <a:t>Click to edit Master text styles</a:t>
             </a:r>
           </a:p>
           <a:p>
             <a:pPr lvl="1"/>
             <a:r>
-              <a:rPr lang="fr-FR" smtClean="0"/>
-              <a:t>Deuxième niveau</a:t>
+              <a:rPr lang="en-US" smtClean="0"/>
+              <a:t>Second level</a:t>
             </a:r>
           </a:p>
           <a:p>
             <a:pPr lvl="2"/>
             <a:r>
-              <a:rPr lang="fr-FR" smtClean="0"/>
-              <a:t>Troisième niveau</a:t>
+              <a:rPr lang="en-US" smtClean="0"/>
+              <a:t>Third level</a:t>
             </a:r>
           </a:p>
           <a:p>
             <a:pPr lvl="3"/>
             <a:r>
-              <a:rPr lang="fr-FR" smtClean="0"/>
-              <a:t>Quatrième niveau</a:t>
+              <a:rPr lang="en-US" smtClean="0"/>
+              <a:t>Fourth level</a:t>
             </a:r>
           </a:p>
           <a:p>
             <a:pPr lvl="4"/>
             <a:r>
-              <a:rPr lang="fr-FR" smtClean="0"/>
-              <a:t>Cinquième niveau</a:t>
-            </a:r>
-            <a:endParaRPr lang="fr-FR"/>
-          </a:p>
-        </p:txBody>
-      </p:sp>
-      <p:sp>
-        <p:nvSpPr>
-          <p:cNvPr id="4" name="Espace réservé de la date 3"/>
+              <a:rPr lang="en-US" smtClean="0"/>
+              <a:t>Fifth level</a:t>
+            </a:r>
+            <a:endParaRPr lang="en-US"/>
+          </a:p>
+        </p:txBody>
+      </p:sp>
+      <p:sp>
+        <p:nvSpPr>
+          <p:cNvPr id="4" name="Date Placeholder 3"/>
           <p:cNvSpPr>
             <a:spLocks noGrp="1"/>
           </p:cNvSpPr>
@@ -640,17 +633,18 @@
           <a:bodyPr/>
           <a:lstStyle/>
           <a:p>
-            <a:fld id="{ACEF5093-F78E-4C54-92B5-273C64AB824F}" type="datetimeFigureOut">
-              <a:rPr lang="fr-FR" smtClean="0"/>
-              <a:t>13/11/2012</a:t>
+            <a:fld id="{1D8BD707-D9CF-40AE-B4C6-C98DA3205C09}" type="datetimeFigureOut">
+              <a:rPr lang="en-US" smtClean="0"/>
+              <a:pPr/>
+              <a:t>8/1/2011</a:t>
             </a:fld>
-            <a:endParaRPr lang="fr-FR"/>
-          </a:p>
-        </p:txBody>
-      </p:sp>
-      <p:sp>
-        <p:nvSpPr>
-          <p:cNvPr id="5" name="Espace réservé du pied de page 4"/>
+            <a:endParaRPr lang="en-US"/>
+          </a:p>
+        </p:txBody>
+      </p:sp>
+      <p:sp>
+        <p:nvSpPr>
+          <p:cNvPr id="5" name="Footer Placeholder 4"/>
           <p:cNvSpPr>
             <a:spLocks noGrp="1"/>
           </p:cNvSpPr>
@@ -663,13 +657,13 @@
           <a:bodyPr/>
           <a:lstStyle/>
           <a:p>
-            <a:endParaRPr lang="fr-FR"/>
-          </a:p>
-        </p:txBody>
-      </p:sp>
-      <p:sp>
-        <p:nvSpPr>
-          <p:cNvPr id="6" name="Espace réservé du numéro de diapositive 5"/>
+            <a:endParaRPr lang="en-US"/>
+          </a:p>
+        </p:txBody>
+      </p:sp>
+      <p:sp>
+        <p:nvSpPr>
+          <p:cNvPr id="6" name="Slide Number Placeholder 5"/>
           <p:cNvSpPr>
             <a:spLocks noGrp="1"/>
           </p:cNvSpPr>
@@ -682,20 +676,16 @@
           <a:bodyPr/>
           <a:lstStyle/>
           <a:p>
-            <a:fld id="{AB1FBAE0-DF1D-4016-913C-26E4459298C9}" type="slidenum">
-              <a:rPr lang="fr-FR" smtClean="0"/>
-              <a:t>‹N°›</a:t>
+            <a:fld id="{B6F15528-21DE-4FAA-801E-634DDDAF4B2B}" type="slidenum">
+              <a:rPr lang="en-US" smtClean="0"/>
+              <a:pPr/>
+              <a:t>‹#›</a:t>
             </a:fld>
-            <a:endParaRPr lang="fr-FR"/>
+            <a:endParaRPr lang="en-US"/>
           </a:p>
         </p:txBody>
       </p:sp>
     </p:spTree>
-    <p:extLst>
-      <p:ext uri="{BB962C8B-B14F-4D97-AF65-F5344CB8AC3E}">
-        <p14:creationId xmlns:p14="http://schemas.microsoft.com/office/powerpoint/2010/main" val="1398285535"/>
-      </p:ext>
-    </p:extLst>
   </p:cSld>
   <p:clrMapOvr>
     <a:masterClrMapping/>
@@ -705,7 +695,7 @@
 
 <file path=ppt/slideLayouts/slideLayout2.xml><?xml version="1.0" encoding="utf-8"?>
 <p:sldLayout xmlns:a="http://schemas.openxmlformats.org/drawingml/2006/main" xmlns:r="http://schemas.openxmlformats.org/officeDocument/2006/relationships" xmlns:p="http://schemas.openxmlformats.org/presentationml/2006/main" type="obj" preserve="1">
-  <p:cSld name="Titre et contenu">
+  <p:cSld name="Title and Content">
     <p:spTree>
       <p:nvGrpSpPr>
         <p:cNvPr id="1" name=""/>
@@ -722,7 +712,7 @@
       </p:grpSpPr>
       <p:sp>
         <p:nvSpPr>
-          <p:cNvPr id="2" name="Titre 1"/>
+          <p:cNvPr id="2" name="Title 1"/>
           <p:cNvSpPr>
             <a:spLocks noGrp="1"/>
           </p:cNvSpPr>
@@ -736,16 +726,16 @@
           <a:lstStyle/>
           <a:p>
             <a:r>
-              <a:rPr lang="fr-FR" smtClean="0"/>
-              <a:t>Modifiez le style du titre</a:t>
-            </a:r>
-            <a:endParaRPr lang="fr-FR"/>
-          </a:p>
-        </p:txBody>
-      </p:sp>
-      <p:sp>
-        <p:nvSpPr>
-          <p:cNvPr id="3" name="Espace réservé du contenu 2"/>
+              <a:rPr lang="en-US" smtClean="0"/>
+              <a:t>Click to edit Master title style</a:t>
+            </a:r>
+            <a:endParaRPr lang="en-US"/>
+          </a:p>
+        </p:txBody>
+      </p:sp>
+      <p:sp>
+        <p:nvSpPr>
+          <p:cNvPr id="3" name="Content Placeholder 2"/>
           <p:cNvSpPr>
             <a:spLocks noGrp="1"/>
           </p:cNvSpPr>
@@ -760,44 +750,44 @@
           <a:p>
             <a:pPr lvl="0"/>
             <a:r>
-              <a:rPr lang="fr-FR" smtClean="0"/>
-              <a:t>Modifiez les styles du texte du masque</a:t>
+              <a:rPr lang="en-US" smtClean="0"/>
+              <a:t>Click to edit Master text styles</a:t>
             </a:r>
           </a:p>
           <a:p>
             <a:pPr lvl="1"/>
             <a:r>
-              <a:rPr lang="fr-FR" smtClean="0"/>
-              <a:t>Deuxième niveau</a:t>
+              <a:rPr lang="en-US" smtClean="0"/>
+              <a:t>Second level</a:t>
             </a:r>
           </a:p>
           <a:p>
             <a:pPr lvl="2"/>
             <a:r>
-              <a:rPr lang="fr-FR" smtClean="0"/>
-              <a:t>Troisième niveau</a:t>
+              <a:rPr lang="en-US" smtClean="0"/>
+              <a:t>Third level</a:t>
             </a:r>
           </a:p>
           <a:p>
             <a:pPr lvl="3"/>
             <a:r>
-              <a:rPr lang="fr-FR" smtClean="0"/>
-              <a:t>Quatrième niveau</a:t>
+              <a:rPr lang="en-US" smtClean="0"/>
+              <a:t>Fourth level</a:t>
             </a:r>
           </a:p>
           <a:p>
             <a:pPr lvl="4"/>
             <a:r>
-              <a:rPr lang="fr-FR" smtClean="0"/>
-              <a:t>Cinquième niveau</a:t>
-            </a:r>
-            <a:endParaRPr lang="fr-FR"/>
-          </a:p>
-        </p:txBody>
-      </p:sp>
-      <p:sp>
-        <p:nvSpPr>
-          <p:cNvPr id="4" name="Espace réservé de la date 3"/>
+              <a:rPr lang="en-US" smtClean="0"/>
+              <a:t>Fifth level</a:t>
+            </a:r>
+            <a:endParaRPr lang="en-US"/>
+          </a:p>
+        </p:txBody>
+      </p:sp>
+      <p:sp>
+        <p:nvSpPr>
+          <p:cNvPr id="4" name="Date Placeholder 3"/>
           <p:cNvSpPr>
             <a:spLocks noGrp="1"/>
           </p:cNvSpPr>
@@ -810,17 +800,18 @@
           <a:bodyPr/>
           <a:lstStyle/>
           <a:p>
-            <a:fld id="{ACEF5093-F78E-4C54-92B5-273C64AB824F}" type="datetimeFigureOut">
-              <a:rPr lang="fr-FR" smtClean="0"/>
-              <a:t>13/11/2012</a:t>
+            <a:fld id="{1D8BD707-D9CF-40AE-B4C6-C98DA3205C09}" type="datetimeFigureOut">
+              <a:rPr lang="en-US" smtClean="0"/>
+              <a:pPr/>
+              <a:t>8/1/2011</a:t>
             </a:fld>
-            <a:endParaRPr lang="fr-FR"/>
-          </a:p>
-        </p:txBody>
-      </p:sp>
-      <p:sp>
-        <p:nvSpPr>
-          <p:cNvPr id="5" name="Espace réservé du pied de page 4"/>
+            <a:endParaRPr lang="en-US"/>
+          </a:p>
+        </p:txBody>
+      </p:sp>
+      <p:sp>
+        <p:nvSpPr>
+          <p:cNvPr id="5" name="Footer Placeholder 4"/>
           <p:cNvSpPr>
             <a:spLocks noGrp="1"/>
           </p:cNvSpPr>
@@ -833,13 +824,13 @@
           <a:bodyPr/>
           <a:lstStyle/>
           <a:p>
-            <a:endParaRPr lang="fr-FR"/>
-          </a:p>
-        </p:txBody>
-      </p:sp>
-      <p:sp>
-        <p:nvSpPr>
-          <p:cNvPr id="6" name="Espace réservé du numéro de diapositive 5"/>
+            <a:endParaRPr lang="en-US"/>
+          </a:p>
+        </p:txBody>
+      </p:sp>
+      <p:sp>
+        <p:nvSpPr>
+          <p:cNvPr id="6" name="Slide Number Placeholder 5"/>
           <p:cNvSpPr>
             <a:spLocks noGrp="1"/>
           </p:cNvSpPr>
@@ -852,20 +843,16 @@
           <a:bodyPr/>
           <a:lstStyle/>
           <a:p>
-            <a:fld id="{AB1FBAE0-DF1D-4016-913C-26E4459298C9}" type="slidenum">
-              <a:rPr lang="fr-FR" smtClean="0"/>
-              <a:t>‹N°›</a:t>
+            <a:fld id="{B6F15528-21DE-4FAA-801E-634DDDAF4B2B}" type="slidenum">
+              <a:rPr lang="en-US" smtClean="0"/>
+              <a:pPr/>
+              <a:t>‹#›</a:t>
             </a:fld>
-            <a:endParaRPr lang="fr-FR"/>
+            <a:endParaRPr lang="en-US"/>
           </a:p>
         </p:txBody>
       </p:sp>
     </p:spTree>
-    <p:extLst>
-      <p:ext uri="{BB962C8B-B14F-4D97-AF65-F5344CB8AC3E}">
-        <p14:creationId xmlns:p14="http://schemas.microsoft.com/office/powerpoint/2010/main" val="2916000491"/>
-      </p:ext>
-    </p:extLst>
   </p:cSld>
   <p:clrMapOvr>
     <a:masterClrMapping/>
@@ -875,7 +862,7 @@
 
 <file path=ppt/slideLayouts/slideLayout3.xml><?xml version="1.0" encoding="utf-8"?>
 <p:sldLayout xmlns:a="http://schemas.openxmlformats.org/drawingml/2006/main" xmlns:r="http://schemas.openxmlformats.org/officeDocument/2006/relationships" xmlns:p="http://schemas.openxmlformats.org/presentationml/2006/main" type="secHead" preserve="1">
-  <p:cSld name="Titre de section">
+  <p:cSld name="Section Header">
     <p:spTree>
       <p:nvGrpSpPr>
         <p:cNvPr id="1" name=""/>
@@ -892,7 +879,7 @@
       </p:grpSpPr>
       <p:sp>
         <p:nvSpPr>
-          <p:cNvPr id="2" name="Titre 1"/>
+          <p:cNvPr id="2" name="Title 1"/>
           <p:cNvSpPr>
             <a:spLocks noGrp="1"/>
           </p:cNvSpPr>
@@ -915,16 +902,16 @@
           </a:lstStyle>
           <a:p>
             <a:r>
-              <a:rPr lang="fr-FR" smtClean="0"/>
-              <a:t>Modifiez le style du titre</a:t>
-            </a:r>
-            <a:endParaRPr lang="fr-FR"/>
-          </a:p>
-        </p:txBody>
-      </p:sp>
-      <p:sp>
-        <p:nvSpPr>
-          <p:cNvPr id="3" name="Espace réservé du texte 2"/>
+              <a:rPr lang="en-US" smtClean="0"/>
+              <a:t>Click to edit Master title style</a:t>
+            </a:r>
+            <a:endParaRPr lang="en-US"/>
+          </a:p>
+        </p:txBody>
+      </p:sp>
+      <p:sp>
+        <p:nvSpPr>
+          <p:cNvPr id="3" name="Text Placeholder 2"/>
           <p:cNvSpPr>
             <a:spLocks noGrp="1"/>
           </p:cNvSpPr>
@@ -1035,15 +1022,15 @@
           <a:p>
             <a:pPr lvl="0"/>
             <a:r>
-              <a:rPr lang="fr-FR" smtClean="0"/>
-              <a:t>Modifiez les styles du texte du masque</a:t>
-            </a:r>
-          </a:p>
-        </p:txBody>
-      </p:sp>
-      <p:sp>
-        <p:nvSpPr>
-          <p:cNvPr id="4" name="Espace réservé de la date 3"/>
+              <a:rPr lang="en-US" smtClean="0"/>
+              <a:t>Click to edit Master text styles</a:t>
+            </a:r>
+          </a:p>
+        </p:txBody>
+      </p:sp>
+      <p:sp>
+        <p:nvSpPr>
+          <p:cNvPr id="4" name="Date Placeholder 3"/>
           <p:cNvSpPr>
             <a:spLocks noGrp="1"/>
           </p:cNvSpPr>
@@ -1056,17 +1043,18 @@
           <a:bodyPr/>
           <a:lstStyle/>
           <a:p>
-            <a:fld id="{ACEF5093-F78E-4C54-92B5-273C64AB824F}" type="datetimeFigureOut">
-              <a:rPr lang="fr-FR" smtClean="0"/>
-              <a:t>13/11/2012</a:t>
+            <a:fld id="{1D8BD707-D9CF-40AE-B4C6-C98DA3205C09}" type="datetimeFigureOut">
+              <a:rPr lang="en-US" smtClean="0"/>
+              <a:pPr/>
+              <a:t>8/1/2011</a:t>
             </a:fld>
-            <a:endParaRPr lang="fr-FR"/>
-          </a:p>
-        </p:txBody>
-      </p:sp>
-      <p:sp>
-        <p:nvSpPr>
-          <p:cNvPr id="5" name="Espace réservé du pied de page 4"/>
+            <a:endParaRPr lang="en-US"/>
+          </a:p>
+        </p:txBody>
+      </p:sp>
+      <p:sp>
+        <p:nvSpPr>
+          <p:cNvPr id="5" name="Footer Placeholder 4"/>
           <p:cNvSpPr>
             <a:spLocks noGrp="1"/>
           </p:cNvSpPr>
@@ -1079,13 +1067,13 @@
           <a:bodyPr/>
           <a:lstStyle/>
           <a:p>
-            <a:endParaRPr lang="fr-FR"/>
-          </a:p>
-        </p:txBody>
-      </p:sp>
-      <p:sp>
-        <p:nvSpPr>
-          <p:cNvPr id="6" name="Espace réservé du numéro de diapositive 5"/>
+            <a:endParaRPr lang="en-US"/>
+          </a:p>
+        </p:txBody>
+      </p:sp>
+      <p:sp>
+        <p:nvSpPr>
+          <p:cNvPr id="6" name="Slide Number Placeholder 5"/>
           <p:cNvSpPr>
             <a:spLocks noGrp="1"/>
           </p:cNvSpPr>
@@ -1098,20 +1086,16 @@
           <a:bodyPr/>
           <a:lstStyle/>
           <a:p>
-            <a:fld id="{AB1FBAE0-DF1D-4016-913C-26E4459298C9}" type="slidenum">
-              <a:rPr lang="fr-FR" smtClean="0"/>
-              <a:t>‹N°›</a:t>
+            <a:fld id="{B6F15528-21DE-4FAA-801E-634DDDAF4B2B}" type="slidenum">
+              <a:rPr lang="en-US" smtClean="0"/>
+              <a:pPr/>
+              <a:t>‹#›</a:t>
             </a:fld>
-            <a:endParaRPr lang="fr-FR"/>
+            <a:endParaRPr lang="en-US"/>
           </a:p>
         </p:txBody>
       </p:sp>
     </p:spTree>
-    <p:extLst>
-      <p:ext uri="{BB962C8B-B14F-4D97-AF65-F5344CB8AC3E}">
-        <p14:creationId xmlns:p14="http://schemas.microsoft.com/office/powerpoint/2010/main" val="2359508162"/>
-      </p:ext>
-    </p:extLst>
   </p:cSld>
   <p:clrMapOvr>
     <a:masterClrMapping/>
@@ -1121,7 +1105,7 @@
 
 <file path=ppt/slideLayouts/slideLayout4.xml><?xml version="1.0" encoding="utf-8"?>
 <p:sldLayout xmlns:a="http://schemas.openxmlformats.org/drawingml/2006/main" xmlns:r="http://schemas.openxmlformats.org/officeDocument/2006/relationships" xmlns:p="http://schemas.openxmlformats.org/presentationml/2006/main" type="twoObj" preserve="1">
-  <p:cSld name="Deux contenus">
+  <p:cSld name="Two Content">
     <p:spTree>
       <p:nvGrpSpPr>
         <p:cNvPr id="1" name=""/>
@@ -1138,7 +1122,7 @@
       </p:grpSpPr>
       <p:sp>
         <p:nvSpPr>
-          <p:cNvPr id="2" name="Titre 1"/>
+          <p:cNvPr id="2" name="Title 1"/>
           <p:cNvSpPr>
             <a:spLocks noGrp="1"/>
           </p:cNvSpPr>
@@ -1152,16 +1136,16 @@
           <a:lstStyle/>
           <a:p>
             <a:r>
-              <a:rPr lang="fr-FR" smtClean="0"/>
-              <a:t>Modifiez le style du titre</a:t>
-            </a:r>
-            <a:endParaRPr lang="fr-FR"/>
-          </a:p>
-        </p:txBody>
-      </p:sp>
-      <p:sp>
-        <p:nvSpPr>
-          <p:cNvPr id="3" name="Espace réservé du contenu 2"/>
+              <a:rPr lang="en-US" smtClean="0"/>
+              <a:t>Click to edit Master title style</a:t>
+            </a:r>
+            <a:endParaRPr lang="en-US"/>
+          </a:p>
+        </p:txBody>
+      </p:sp>
+      <p:sp>
+        <p:nvSpPr>
+          <p:cNvPr id="3" name="Content Placeholder 2"/>
           <p:cNvSpPr>
             <a:spLocks noGrp="1"/>
           </p:cNvSpPr>
@@ -1209,44 +1193,44 @@
           <a:p>
             <a:pPr lvl="0"/>
             <a:r>
-              <a:rPr lang="fr-FR" smtClean="0"/>
-              <a:t>Modifiez les styles du texte du masque</a:t>
+              <a:rPr lang="en-US" smtClean="0"/>
+              <a:t>Click to edit Master text styles</a:t>
             </a:r>
           </a:p>
           <a:p>
             <a:pPr lvl="1"/>
             <a:r>
-              <a:rPr lang="fr-FR" smtClean="0"/>
-              <a:t>Deuxième niveau</a:t>
+              <a:rPr lang="en-US" smtClean="0"/>
+              <a:t>Second level</a:t>
             </a:r>
           </a:p>
           <a:p>
             <a:pPr lvl="2"/>
             <a:r>
-              <a:rPr lang="fr-FR" smtClean="0"/>
-              <a:t>Troisième niveau</a:t>
+              <a:rPr lang="en-US" smtClean="0"/>
+              <a:t>Third level</a:t>
             </a:r>
           </a:p>
           <a:p>
             <a:pPr lvl="3"/>
             <a:r>
-              <a:rPr lang="fr-FR" smtClean="0"/>
-              <a:t>Quatrième niveau</a:t>
+              <a:rPr lang="en-US" smtClean="0"/>
+              <a:t>Fourth level</a:t>
             </a:r>
           </a:p>
           <a:p>
             <a:pPr lvl="4"/>
             <a:r>
-              <a:rPr lang="fr-FR" smtClean="0"/>
-              <a:t>Cinquième niveau</a:t>
-            </a:r>
-            <a:endParaRPr lang="fr-FR"/>
-          </a:p>
-        </p:txBody>
-      </p:sp>
-      <p:sp>
-        <p:nvSpPr>
-          <p:cNvPr id="4" name="Espace réservé du contenu 3"/>
+              <a:rPr lang="en-US" smtClean="0"/>
+              <a:t>Fifth level</a:t>
+            </a:r>
+            <a:endParaRPr lang="en-US"/>
+          </a:p>
+        </p:txBody>
+      </p:sp>
+      <p:sp>
+        <p:nvSpPr>
+          <p:cNvPr id="4" name="Content Placeholder 3"/>
           <p:cNvSpPr>
             <a:spLocks noGrp="1"/>
           </p:cNvSpPr>
@@ -1294,44 +1278,44 @@
           <a:p>
             <a:pPr lvl="0"/>
             <a:r>
-              <a:rPr lang="fr-FR" smtClean="0"/>
-              <a:t>Modifiez les styles du texte du masque</a:t>
+              <a:rPr lang="en-US" smtClean="0"/>
+              <a:t>Click to edit Master text styles</a:t>
             </a:r>
           </a:p>
           <a:p>
             <a:pPr lvl="1"/>
             <a:r>
-              <a:rPr lang="fr-FR" smtClean="0"/>
-              <a:t>Deuxième niveau</a:t>
+              <a:rPr lang="en-US" smtClean="0"/>
+              <a:t>Second level</a:t>
             </a:r>
           </a:p>
           <a:p>
             <a:pPr lvl="2"/>
             <a:r>
-              <a:rPr lang="fr-FR" smtClean="0"/>
-              <a:t>Troisième niveau</a:t>
+              <a:rPr lang="en-US" smtClean="0"/>
+              <a:t>Third level</a:t>
             </a:r>
           </a:p>
           <a:p>
             <a:pPr lvl="3"/>
             <a:r>
-              <a:rPr lang="fr-FR" smtClean="0"/>
-              <a:t>Quatrième niveau</a:t>
+              <a:rPr lang="en-US" smtClean="0"/>
+              <a:t>Fourth level</a:t>
             </a:r>
           </a:p>
           <a:p>
             <a:pPr lvl="4"/>
             <a:r>
-              <a:rPr lang="fr-FR" smtClean="0"/>
-              <a:t>Cinquième niveau</a:t>
-            </a:r>
-            <a:endParaRPr lang="fr-FR"/>
-          </a:p>
-        </p:txBody>
-      </p:sp>
-      <p:sp>
-        <p:nvSpPr>
-          <p:cNvPr id="5" name="Espace réservé de la date 4"/>
+              <a:rPr lang="en-US" smtClean="0"/>
+              <a:t>Fifth level</a:t>
+            </a:r>
+            <a:endParaRPr lang="en-US"/>
+          </a:p>
+        </p:txBody>
+      </p:sp>
+      <p:sp>
+        <p:nvSpPr>
+          <p:cNvPr id="5" name="Date Placeholder 4"/>
           <p:cNvSpPr>
             <a:spLocks noGrp="1"/>
           </p:cNvSpPr>
@@ -1344,17 +1328,18 @@
           <a:bodyPr/>
           <a:lstStyle/>
           <a:p>
-            <a:fld id="{ACEF5093-F78E-4C54-92B5-273C64AB824F}" type="datetimeFigureOut">
-              <a:rPr lang="fr-FR" smtClean="0"/>
-              <a:t>13/11/2012</a:t>
+            <a:fld id="{1D8BD707-D9CF-40AE-B4C6-C98DA3205C09}" type="datetimeFigureOut">
+              <a:rPr lang="en-US" smtClean="0"/>
+              <a:pPr/>
+              <a:t>8/1/2011</a:t>
             </a:fld>
-            <a:endParaRPr lang="fr-FR"/>
-          </a:p>
-        </p:txBody>
-      </p:sp>
-      <p:sp>
-        <p:nvSpPr>
-          <p:cNvPr id="6" name="Espace réservé du pied de page 5"/>
+            <a:endParaRPr lang="en-US"/>
+          </a:p>
+        </p:txBody>
+      </p:sp>
+      <p:sp>
+        <p:nvSpPr>
+          <p:cNvPr id="6" name="Footer Placeholder 5"/>
           <p:cNvSpPr>
             <a:spLocks noGrp="1"/>
           </p:cNvSpPr>
@@ -1367,13 +1352,13 @@
           <a:bodyPr/>
           <a:lstStyle/>
           <a:p>
-            <a:endParaRPr lang="fr-FR"/>
-          </a:p>
-        </p:txBody>
-      </p:sp>
-      <p:sp>
-        <p:nvSpPr>
-          <p:cNvPr id="7" name="Espace réservé du numéro de diapositive 6"/>
+            <a:endParaRPr lang="en-US"/>
+          </a:p>
+        </p:txBody>
+      </p:sp>
+      <p:sp>
+        <p:nvSpPr>
+          <p:cNvPr id="7" name="Slide Number Placeholder 6"/>
           <p:cNvSpPr>
             <a:spLocks noGrp="1"/>
           </p:cNvSpPr>
@@ -1386,20 +1371,16 @@
           <a:bodyPr/>
           <a:lstStyle/>
           <a:p>
-            <a:fld id="{AB1FBAE0-DF1D-4016-913C-26E4459298C9}" type="slidenum">
-              <a:rPr lang="fr-FR" smtClean="0"/>
-              <a:t>‹N°›</a:t>
+            <a:fld id="{B6F15528-21DE-4FAA-801E-634DDDAF4B2B}" type="slidenum">
+              <a:rPr lang="en-US" smtClean="0"/>
+              <a:pPr/>
+              <a:t>‹#›</a:t>
             </a:fld>
-            <a:endParaRPr lang="fr-FR"/>
+            <a:endParaRPr lang="en-US"/>
           </a:p>
         </p:txBody>
       </p:sp>
     </p:spTree>
-    <p:extLst>
-      <p:ext uri="{BB962C8B-B14F-4D97-AF65-F5344CB8AC3E}">
-        <p14:creationId xmlns:p14="http://schemas.microsoft.com/office/powerpoint/2010/main" val="1454785584"/>
-      </p:ext>
-    </p:extLst>
   </p:cSld>
   <p:clrMapOvr>
     <a:masterClrMapping/>
@@ -1409,7 +1390,7 @@
 
 <file path=ppt/slideLayouts/slideLayout5.xml><?xml version="1.0" encoding="utf-8"?>
 <p:sldLayout xmlns:a="http://schemas.openxmlformats.org/drawingml/2006/main" xmlns:r="http://schemas.openxmlformats.org/officeDocument/2006/relationships" xmlns:p="http://schemas.openxmlformats.org/presentationml/2006/main" type="twoTxTwoObj" preserve="1">
-  <p:cSld name="Comparaison">
+  <p:cSld name="Comparison">
     <p:spTree>
       <p:nvGrpSpPr>
         <p:cNvPr id="1" name=""/>
@@ -1426,7 +1407,7 @@
       </p:grpSpPr>
       <p:sp>
         <p:nvSpPr>
-          <p:cNvPr id="2" name="Titre 1"/>
+          <p:cNvPr id="2" name="Title 1"/>
           <p:cNvSpPr>
             <a:spLocks noGrp="1"/>
           </p:cNvSpPr>
@@ -1444,16 +1425,16 @@
           </a:lstStyle>
           <a:p>
             <a:r>
-              <a:rPr lang="fr-FR" smtClean="0"/>
-              <a:t>Modifiez le style du titre</a:t>
-            </a:r>
-            <a:endParaRPr lang="fr-FR"/>
-          </a:p>
-        </p:txBody>
-      </p:sp>
-      <p:sp>
-        <p:nvSpPr>
-          <p:cNvPr id="3" name="Espace réservé du texte 2"/>
+              <a:rPr lang="en-US" smtClean="0"/>
+              <a:t>Click to edit Master title style</a:t>
+            </a:r>
+            <a:endParaRPr lang="en-US"/>
+          </a:p>
+        </p:txBody>
+      </p:sp>
+      <p:sp>
+        <p:nvSpPr>
+          <p:cNvPr id="3" name="Text Placeholder 2"/>
           <p:cNvSpPr>
             <a:spLocks noGrp="1"/>
           </p:cNvSpPr>
@@ -1510,15 +1491,15 @@
           <a:p>
             <a:pPr lvl="0"/>
             <a:r>
-              <a:rPr lang="fr-FR" smtClean="0"/>
-              <a:t>Modifiez les styles du texte du masque</a:t>
-            </a:r>
-          </a:p>
-        </p:txBody>
-      </p:sp>
-      <p:sp>
-        <p:nvSpPr>
-          <p:cNvPr id="4" name="Espace réservé du contenu 3"/>
+              <a:rPr lang="en-US" smtClean="0"/>
+              <a:t>Click to edit Master text styles</a:t>
+            </a:r>
+          </a:p>
+        </p:txBody>
+      </p:sp>
+      <p:sp>
+        <p:nvSpPr>
+          <p:cNvPr id="4" name="Content Placeholder 3"/>
           <p:cNvSpPr>
             <a:spLocks noGrp="1"/>
           </p:cNvSpPr>
@@ -1566,44 +1547,44 @@
           <a:p>
             <a:pPr lvl="0"/>
             <a:r>
-              <a:rPr lang="fr-FR" smtClean="0"/>
-              <a:t>Modifiez les styles du texte du masque</a:t>
+              <a:rPr lang="en-US" smtClean="0"/>
+              <a:t>Click to edit Master text styles</a:t>
             </a:r>
           </a:p>
           <a:p>
             <a:pPr lvl="1"/>
             <a:r>
-              <a:rPr lang="fr-FR" smtClean="0"/>
-              <a:t>Deuxième niveau</a:t>
+              <a:rPr lang="en-US" smtClean="0"/>
+              <a:t>Second level</a:t>
             </a:r>
           </a:p>
           <a:p>
             <a:pPr lvl="2"/>
             <a:r>
-              <a:rPr lang="fr-FR" smtClean="0"/>
-              <a:t>Troisième niveau</a:t>
+              <a:rPr lang="en-US" smtClean="0"/>
+              <a:t>Third level</a:t>
             </a:r>
           </a:p>
           <a:p>
             <a:pPr lvl="3"/>
             <a:r>
-              <a:rPr lang="fr-FR" smtClean="0"/>
-              <a:t>Quatrième niveau</a:t>
+              <a:rPr lang="en-US" smtClean="0"/>
+              <a:t>Fourth level</a:t>
             </a:r>
           </a:p>
           <a:p>
             <a:pPr lvl="4"/>
             <a:r>
-              <a:rPr lang="fr-FR" smtClean="0"/>
-              <a:t>Cinquième niveau</a:t>
-            </a:r>
-            <a:endParaRPr lang="fr-FR"/>
-          </a:p>
-        </p:txBody>
-      </p:sp>
-      <p:sp>
-        <p:nvSpPr>
-          <p:cNvPr id="5" name="Espace réservé du texte 4"/>
+              <a:rPr lang="en-US" smtClean="0"/>
+              <a:t>Fifth level</a:t>
+            </a:r>
+            <a:endParaRPr lang="en-US"/>
+          </a:p>
+        </p:txBody>
+      </p:sp>
+      <p:sp>
+        <p:nvSpPr>
+          <p:cNvPr id="5" name="Text Placeholder 4"/>
           <p:cNvSpPr>
             <a:spLocks noGrp="1"/>
           </p:cNvSpPr>
@@ -1660,15 +1641,15 @@
           <a:p>
             <a:pPr lvl="0"/>
             <a:r>
-              <a:rPr lang="fr-FR" smtClean="0"/>
-              <a:t>Modifiez les styles du texte du masque</a:t>
-            </a:r>
-          </a:p>
-        </p:txBody>
-      </p:sp>
-      <p:sp>
-        <p:nvSpPr>
-          <p:cNvPr id="6" name="Espace réservé du contenu 5"/>
+              <a:rPr lang="en-US" smtClean="0"/>
+              <a:t>Click to edit Master text styles</a:t>
+            </a:r>
+          </a:p>
+        </p:txBody>
+      </p:sp>
+      <p:sp>
+        <p:nvSpPr>
+          <p:cNvPr id="6" name="Content Placeholder 5"/>
           <p:cNvSpPr>
             <a:spLocks noGrp="1"/>
           </p:cNvSpPr>
@@ -1716,44 +1697,44 @@
           <a:p>
             <a:pPr lvl="0"/>
             <a:r>
-              <a:rPr lang="fr-FR" smtClean="0"/>
-              <a:t>Modifiez les styles du texte du masque</a:t>
+              <a:rPr lang="en-US" smtClean="0"/>
+              <a:t>Click to edit Master text styles</a:t>
             </a:r>
           </a:p>
           <a:p>
             <a:pPr lvl="1"/>
             <a:r>
-              <a:rPr lang="fr-FR" smtClean="0"/>
-              <a:t>Deuxième niveau</a:t>
+              <a:rPr lang="en-US" smtClean="0"/>
+              <a:t>Second level</a:t>
             </a:r>
           </a:p>
           <a:p>
             <a:pPr lvl="2"/>
             <a:r>
-              <a:rPr lang="fr-FR" smtClean="0"/>
-              <a:t>Troisième niveau</a:t>
+              <a:rPr lang="en-US" smtClean="0"/>
+              <a:t>Third level</a:t>
             </a:r>
           </a:p>
           <a:p>
             <a:pPr lvl="3"/>
             <a:r>
-              <a:rPr lang="fr-FR" smtClean="0"/>
-              <a:t>Quatrième niveau</a:t>
+              <a:rPr lang="en-US" smtClean="0"/>
+              <a:t>Fourth level</a:t>
             </a:r>
           </a:p>
           <a:p>
             <a:pPr lvl="4"/>
             <a:r>
-              <a:rPr lang="fr-FR" smtClean="0"/>
-              <a:t>Cinquième niveau</a:t>
-            </a:r>
-            <a:endParaRPr lang="fr-FR"/>
-          </a:p>
-        </p:txBody>
-      </p:sp>
-      <p:sp>
-        <p:nvSpPr>
-          <p:cNvPr id="7" name="Espace réservé de la date 6"/>
+              <a:rPr lang="en-US" smtClean="0"/>
+              <a:t>Fifth level</a:t>
+            </a:r>
+            <a:endParaRPr lang="en-US"/>
+          </a:p>
+        </p:txBody>
+      </p:sp>
+      <p:sp>
+        <p:nvSpPr>
+          <p:cNvPr id="7" name="Date Placeholder 6"/>
           <p:cNvSpPr>
             <a:spLocks noGrp="1"/>
           </p:cNvSpPr>
@@ -1766,17 +1747,18 @@
           <a:bodyPr/>
           <a:lstStyle/>
           <a:p>
-            <a:fld id="{ACEF5093-F78E-4C54-92B5-273C64AB824F}" type="datetimeFigureOut">
-              <a:rPr lang="fr-FR" smtClean="0"/>
-              <a:t>13/11/2012</a:t>
+            <a:fld id="{1D8BD707-D9CF-40AE-B4C6-C98DA3205C09}" type="datetimeFigureOut">
+              <a:rPr lang="en-US" smtClean="0"/>
+              <a:pPr/>
+              <a:t>8/1/2011</a:t>
             </a:fld>
-            <a:endParaRPr lang="fr-FR"/>
-          </a:p>
-        </p:txBody>
-      </p:sp>
-      <p:sp>
-        <p:nvSpPr>
-          <p:cNvPr id="8" name="Espace réservé du pied de page 7"/>
+            <a:endParaRPr lang="en-US"/>
+          </a:p>
+        </p:txBody>
+      </p:sp>
+      <p:sp>
+        <p:nvSpPr>
+          <p:cNvPr id="8" name="Footer Placeholder 7"/>
           <p:cNvSpPr>
             <a:spLocks noGrp="1"/>
           </p:cNvSpPr>
@@ -1789,13 +1771,13 @@
           <a:bodyPr/>
           <a:lstStyle/>
           <a:p>
-            <a:endParaRPr lang="fr-FR"/>
-          </a:p>
-        </p:txBody>
-      </p:sp>
-      <p:sp>
-        <p:nvSpPr>
-          <p:cNvPr id="9" name="Espace réservé du numéro de diapositive 8"/>
+            <a:endParaRPr lang="en-US"/>
+          </a:p>
+        </p:txBody>
+      </p:sp>
+      <p:sp>
+        <p:nvSpPr>
+          <p:cNvPr id="9" name="Slide Number Placeholder 8"/>
           <p:cNvSpPr>
             <a:spLocks noGrp="1"/>
           </p:cNvSpPr>
@@ -1808,20 +1790,16 @@
           <a:bodyPr/>
           <a:lstStyle/>
           <a:p>
-            <a:fld id="{AB1FBAE0-DF1D-4016-913C-26E4459298C9}" type="slidenum">
-              <a:rPr lang="fr-FR" smtClean="0"/>
-              <a:t>‹N°›</a:t>
+            <a:fld id="{B6F15528-21DE-4FAA-801E-634DDDAF4B2B}" type="slidenum">
+              <a:rPr lang="en-US" smtClean="0"/>
+              <a:pPr/>
+              <a:t>‹#›</a:t>
             </a:fld>
-            <a:endParaRPr lang="fr-FR"/>
+            <a:endParaRPr lang="en-US"/>
           </a:p>
         </p:txBody>
       </p:sp>
     </p:spTree>
-    <p:extLst>
-      <p:ext uri="{BB962C8B-B14F-4D97-AF65-F5344CB8AC3E}">
-        <p14:creationId xmlns:p14="http://schemas.microsoft.com/office/powerpoint/2010/main" val="2425196754"/>
-      </p:ext>
-    </p:extLst>
   </p:cSld>
   <p:clrMapOvr>
     <a:masterClrMapping/>
@@ -1831,7 +1809,7 @@
 
 <file path=ppt/slideLayouts/slideLayout6.xml><?xml version="1.0" encoding="utf-8"?>
 <p:sldLayout xmlns:a="http://schemas.openxmlformats.org/drawingml/2006/main" xmlns:r="http://schemas.openxmlformats.org/officeDocument/2006/relationships" xmlns:p="http://schemas.openxmlformats.org/presentationml/2006/main" type="titleOnly" preserve="1">
-  <p:cSld name="Titre seul">
+  <p:cSld name="Title Only">
     <p:spTree>
       <p:nvGrpSpPr>
         <p:cNvPr id="1" name=""/>
@@ -1848,7 +1826,7 @@
       </p:grpSpPr>
       <p:sp>
         <p:nvSpPr>
-          <p:cNvPr id="2" name="Titre 1"/>
+          <p:cNvPr id="2" name="Title 1"/>
           <p:cNvSpPr>
             <a:spLocks noGrp="1"/>
           </p:cNvSpPr>
@@ -1862,16 +1840,16 @@
           <a:lstStyle/>
           <a:p>
             <a:r>
-              <a:rPr lang="fr-FR" smtClean="0"/>
-              <a:t>Modifiez le style du titre</a:t>
-            </a:r>
-            <a:endParaRPr lang="fr-FR"/>
-          </a:p>
-        </p:txBody>
-      </p:sp>
-      <p:sp>
-        <p:nvSpPr>
-          <p:cNvPr id="3" name="Espace réservé de la date 2"/>
+              <a:rPr lang="en-US" smtClean="0"/>
+              <a:t>Click to edit Master title style</a:t>
+            </a:r>
+            <a:endParaRPr lang="en-US"/>
+          </a:p>
+        </p:txBody>
+      </p:sp>
+      <p:sp>
+        <p:nvSpPr>
+          <p:cNvPr id="3" name="Date Placeholder 2"/>
           <p:cNvSpPr>
             <a:spLocks noGrp="1"/>
           </p:cNvSpPr>
@@ -1884,17 +1862,18 @@
           <a:bodyPr/>
           <a:lstStyle/>
           <a:p>
-            <a:fld id="{ACEF5093-F78E-4C54-92B5-273C64AB824F}" type="datetimeFigureOut">
-              <a:rPr lang="fr-FR" smtClean="0"/>
-              <a:t>13/11/2012</a:t>
+            <a:fld id="{1D8BD707-D9CF-40AE-B4C6-C98DA3205C09}" type="datetimeFigureOut">
+              <a:rPr lang="en-US" smtClean="0"/>
+              <a:pPr/>
+              <a:t>8/1/2011</a:t>
             </a:fld>
-            <a:endParaRPr lang="fr-FR"/>
-          </a:p>
-        </p:txBody>
-      </p:sp>
-      <p:sp>
-        <p:nvSpPr>
-          <p:cNvPr id="4" name="Espace réservé du pied de page 3"/>
+            <a:endParaRPr lang="en-US"/>
+          </a:p>
+        </p:txBody>
+      </p:sp>
+      <p:sp>
+        <p:nvSpPr>
+          <p:cNvPr id="4" name="Footer Placeholder 3"/>
           <p:cNvSpPr>
             <a:spLocks noGrp="1"/>
           </p:cNvSpPr>
@@ -1907,13 +1886,13 @@
           <a:bodyPr/>
           <a:lstStyle/>
           <a:p>
-            <a:endParaRPr lang="fr-FR"/>
-          </a:p>
-        </p:txBody>
-      </p:sp>
-      <p:sp>
-        <p:nvSpPr>
-          <p:cNvPr id="5" name="Espace réservé du numéro de diapositive 4"/>
+            <a:endParaRPr lang="en-US"/>
+          </a:p>
+        </p:txBody>
+      </p:sp>
+      <p:sp>
+        <p:nvSpPr>
+          <p:cNvPr id="5" name="Slide Number Placeholder 4"/>
           <p:cNvSpPr>
             <a:spLocks noGrp="1"/>
           </p:cNvSpPr>
@@ -1926,20 +1905,16 @@
           <a:bodyPr/>
           <a:lstStyle/>
           <a:p>
-            <a:fld id="{AB1FBAE0-DF1D-4016-913C-26E4459298C9}" type="slidenum">
-              <a:rPr lang="fr-FR" smtClean="0"/>
-              <a:t>‹N°›</a:t>
+            <a:fld id="{B6F15528-21DE-4FAA-801E-634DDDAF4B2B}" type="slidenum">
+              <a:rPr lang="en-US" smtClean="0"/>
+              <a:pPr/>
+              <a:t>‹#›</a:t>
             </a:fld>
-            <a:endParaRPr lang="fr-FR"/>
+            <a:endParaRPr lang="en-US"/>
           </a:p>
         </p:txBody>
       </p:sp>
     </p:spTree>
-    <p:extLst>
-      <p:ext uri="{BB962C8B-B14F-4D97-AF65-F5344CB8AC3E}">
-        <p14:creationId xmlns:p14="http://schemas.microsoft.com/office/powerpoint/2010/main" val="3449277634"/>
-      </p:ext>
-    </p:extLst>
   </p:cSld>
   <p:clrMapOvr>
     <a:masterClrMapping/>
@@ -1949,7 +1924,7 @@
 
 <file path=ppt/slideLayouts/slideLayout7.xml><?xml version="1.0" encoding="utf-8"?>
 <p:sldLayout xmlns:a="http://schemas.openxmlformats.org/drawingml/2006/main" xmlns:r="http://schemas.openxmlformats.org/officeDocument/2006/relationships" xmlns:p="http://schemas.openxmlformats.org/presentationml/2006/main" type="blank" preserve="1">
-  <p:cSld name="Vide">
+  <p:cSld name="Blank">
     <p:spTree>
       <p:nvGrpSpPr>
         <p:cNvPr id="1" name=""/>
@@ -1966,7 +1941,7 @@
       </p:grpSpPr>
       <p:sp>
         <p:nvSpPr>
-          <p:cNvPr id="2" name="Espace réservé de la date 1"/>
+          <p:cNvPr id="2" name="Date Placeholder 1"/>
           <p:cNvSpPr>
             <a:spLocks noGrp="1"/>
           </p:cNvSpPr>
@@ -1979,17 +1954,18 @@
           <a:bodyPr/>
           <a:lstStyle/>
           <a:p>
-            <a:fld id="{ACEF5093-F78E-4C54-92B5-273C64AB824F}" type="datetimeFigureOut">
-              <a:rPr lang="fr-FR" smtClean="0"/>
-              <a:t>13/11/2012</a:t>
+            <a:fld id="{1D8BD707-D9CF-40AE-B4C6-C98DA3205C09}" type="datetimeFigureOut">
+              <a:rPr lang="en-US" smtClean="0"/>
+              <a:pPr/>
+              <a:t>8/1/2011</a:t>
             </a:fld>
-            <a:endParaRPr lang="fr-FR"/>
-          </a:p>
-        </p:txBody>
-      </p:sp>
-      <p:sp>
-        <p:nvSpPr>
-          <p:cNvPr id="3" name="Espace réservé du pied de page 2"/>
+            <a:endParaRPr lang="en-US"/>
+          </a:p>
+        </p:txBody>
+      </p:sp>
+      <p:sp>
+        <p:nvSpPr>
+          <p:cNvPr id="3" name="Footer Placeholder 2"/>
           <p:cNvSpPr>
             <a:spLocks noGrp="1"/>
           </p:cNvSpPr>
@@ -2002,13 +1978,13 @@
           <a:bodyPr/>
           <a:lstStyle/>
           <a:p>
-            <a:endParaRPr lang="fr-FR"/>
-          </a:p>
-        </p:txBody>
-      </p:sp>
-      <p:sp>
-        <p:nvSpPr>
-          <p:cNvPr id="4" name="Espace réservé du numéro de diapositive 3"/>
+            <a:endParaRPr lang="en-US"/>
+          </a:p>
+        </p:txBody>
+      </p:sp>
+      <p:sp>
+        <p:nvSpPr>
+          <p:cNvPr id="4" name="Slide Number Placeholder 3"/>
           <p:cNvSpPr>
             <a:spLocks noGrp="1"/>
           </p:cNvSpPr>
@@ -2021,20 +1997,16 @@
           <a:bodyPr/>
           <a:lstStyle/>
           <a:p>
-            <a:fld id="{AB1FBAE0-DF1D-4016-913C-26E4459298C9}" type="slidenum">
-              <a:rPr lang="fr-FR" smtClean="0"/>
-              <a:t>‹N°›</a:t>
+            <a:fld id="{B6F15528-21DE-4FAA-801E-634DDDAF4B2B}" type="slidenum">
+              <a:rPr lang="en-US" smtClean="0"/>
+              <a:pPr/>
+              <a:t>‹#›</a:t>
             </a:fld>
-            <a:endParaRPr lang="fr-FR"/>
+            <a:endParaRPr lang="en-US"/>
           </a:p>
         </p:txBody>
       </p:sp>
     </p:spTree>
-    <p:extLst>
-      <p:ext uri="{BB962C8B-B14F-4D97-AF65-F5344CB8AC3E}">
-        <p14:creationId xmlns:p14="http://schemas.microsoft.com/office/powerpoint/2010/main" val="1165066081"/>
-      </p:ext>
-    </p:extLst>
   </p:cSld>
   <p:clrMapOvr>
     <a:masterClrMapping/>
@@ -2044,7 +2016,7 @@
 
 <file path=ppt/slideLayouts/slideLayout8.xml><?xml version="1.0" encoding="utf-8"?>
 <p:sldLayout xmlns:a="http://schemas.openxmlformats.org/drawingml/2006/main" xmlns:r="http://schemas.openxmlformats.org/officeDocument/2006/relationships" xmlns:p="http://schemas.openxmlformats.org/presentationml/2006/main" type="objTx" preserve="1">
-  <p:cSld name="Contenu avec légende">
+  <p:cSld name="Content with Caption">
     <p:spTree>
       <p:nvGrpSpPr>
         <p:cNvPr id="1" name=""/>
@@ -2061,7 +2033,7 @@
       </p:grpSpPr>
       <p:sp>
         <p:nvSpPr>
-          <p:cNvPr id="2" name="Titre 1"/>
+          <p:cNvPr id="2" name="Title 1"/>
           <p:cNvSpPr>
             <a:spLocks noGrp="1"/>
           </p:cNvSpPr>
@@ -2084,16 +2056,16 @@
           </a:lstStyle>
           <a:p>
             <a:r>
-              <a:rPr lang="fr-FR" smtClean="0"/>
-              <a:t>Modifiez le style du titre</a:t>
-            </a:r>
-            <a:endParaRPr lang="fr-FR"/>
-          </a:p>
-        </p:txBody>
-      </p:sp>
-      <p:sp>
-        <p:nvSpPr>
-          <p:cNvPr id="3" name="Espace réservé du contenu 2"/>
+              <a:rPr lang="en-US" smtClean="0"/>
+              <a:t>Click to edit Master title style</a:t>
+            </a:r>
+            <a:endParaRPr lang="en-US"/>
+          </a:p>
+        </p:txBody>
+      </p:sp>
+      <p:sp>
+        <p:nvSpPr>
+          <p:cNvPr id="3" name="Content Placeholder 2"/>
           <p:cNvSpPr>
             <a:spLocks noGrp="1"/>
           </p:cNvSpPr>
@@ -2141,44 +2113,44 @@
           <a:p>
             <a:pPr lvl="0"/>
             <a:r>
-              <a:rPr lang="fr-FR" smtClean="0"/>
-              <a:t>Modifiez les styles du texte du masque</a:t>
+              <a:rPr lang="en-US" smtClean="0"/>
+              <a:t>Click to edit Master text styles</a:t>
             </a:r>
           </a:p>
           <a:p>
             <a:pPr lvl="1"/>
             <a:r>
-              <a:rPr lang="fr-FR" smtClean="0"/>
-              <a:t>Deuxième niveau</a:t>
+              <a:rPr lang="en-US" smtClean="0"/>
+              <a:t>Second level</a:t>
             </a:r>
           </a:p>
           <a:p>
             <a:pPr lvl="2"/>
             <a:r>
-              <a:rPr lang="fr-FR" smtClean="0"/>
-              <a:t>Troisième niveau</a:t>
+              <a:rPr lang="en-US" smtClean="0"/>
+              <a:t>Third level</a:t>
             </a:r>
           </a:p>
           <a:p>
             <a:pPr lvl="3"/>
             <a:r>
-              <a:rPr lang="fr-FR" smtClean="0"/>
-              <a:t>Quatrième niveau</a:t>
+              <a:rPr lang="en-US" smtClean="0"/>
+              <a:t>Fourth level</a:t>
             </a:r>
           </a:p>
           <a:p>
             <a:pPr lvl="4"/>
             <a:r>
-              <a:rPr lang="fr-FR" smtClean="0"/>
-              <a:t>Cinquième niveau</a:t>
-            </a:r>
-            <a:endParaRPr lang="fr-FR"/>
-          </a:p>
-        </p:txBody>
-      </p:sp>
-      <p:sp>
-        <p:nvSpPr>
-          <p:cNvPr id="4" name="Espace réservé du texte 3"/>
+              <a:rPr lang="en-US" smtClean="0"/>
+              <a:t>Fifth level</a:t>
+            </a:r>
+            <a:endParaRPr lang="en-US"/>
+          </a:p>
+        </p:txBody>
+      </p:sp>
+      <p:sp>
+        <p:nvSpPr>
+          <p:cNvPr id="4" name="Text Placeholder 3"/>
           <p:cNvSpPr>
             <a:spLocks noGrp="1"/>
           </p:cNvSpPr>
@@ -2235,15 +2207,15 @@
           <a:p>
             <a:pPr lvl="0"/>
             <a:r>
-              <a:rPr lang="fr-FR" smtClean="0"/>
-              <a:t>Modifiez les styles du texte du masque</a:t>
-            </a:r>
-          </a:p>
-        </p:txBody>
-      </p:sp>
-      <p:sp>
-        <p:nvSpPr>
-          <p:cNvPr id="5" name="Espace réservé de la date 4"/>
+              <a:rPr lang="en-US" smtClean="0"/>
+              <a:t>Click to edit Master text styles</a:t>
+            </a:r>
+          </a:p>
+        </p:txBody>
+      </p:sp>
+      <p:sp>
+        <p:nvSpPr>
+          <p:cNvPr id="5" name="Date Placeholder 4"/>
           <p:cNvSpPr>
             <a:spLocks noGrp="1"/>
           </p:cNvSpPr>
@@ -2256,17 +2228,18 @@
           <a:bodyPr/>
           <a:lstStyle/>
           <a:p>
-            <a:fld id="{ACEF5093-F78E-4C54-92B5-273C64AB824F}" type="datetimeFigureOut">
-              <a:rPr lang="fr-FR" smtClean="0"/>
-              <a:t>13/11/2012</a:t>
+            <a:fld id="{1D8BD707-D9CF-40AE-B4C6-C98DA3205C09}" type="datetimeFigureOut">
+              <a:rPr lang="en-US" smtClean="0"/>
+              <a:pPr/>
+              <a:t>8/1/2011</a:t>
             </a:fld>
-            <a:endParaRPr lang="fr-FR"/>
-          </a:p>
-        </p:txBody>
-      </p:sp>
-      <p:sp>
-        <p:nvSpPr>
-          <p:cNvPr id="6" name="Espace réservé du pied de page 5"/>
+            <a:endParaRPr lang="en-US"/>
+          </a:p>
+        </p:txBody>
+      </p:sp>
+      <p:sp>
+        <p:nvSpPr>
+          <p:cNvPr id="6" name="Footer Placeholder 5"/>
           <p:cNvSpPr>
             <a:spLocks noGrp="1"/>
           </p:cNvSpPr>
@@ -2279,13 +2252,13 @@
           <a:bodyPr/>
           <a:lstStyle/>
           <a:p>
-            <a:endParaRPr lang="fr-FR"/>
-          </a:p>
-        </p:txBody>
-      </p:sp>
-      <p:sp>
-        <p:nvSpPr>
-          <p:cNvPr id="7" name="Espace réservé du numéro de diapositive 6"/>
+            <a:endParaRPr lang="en-US"/>
+          </a:p>
+        </p:txBody>
+      </p:sp>
+      <p:sp>
+        <p:nvSpPr>
+          <p:cNvPr id="7" name="Slide Number Placeholder 6"/>
           <p:cNvSpPr>
             <a:spLocks noGrp="1"/>
           </p:cNvSpPr>
@@ -2298,20 +2271,16 @@
           <a:bodyPr/>
           <a:lstStyle/>
           <a:p>
-            <a:fld id="{AB1FBAE0-DF1D-4016-913C-26E4459298C9}" type="slidenum">
-              <a:rPr lang="fr-FR" smtClean="0"/>
-              <a:t>‹N°›</a:t>
+            <a:fld id="{B6F15528-21DE-4FAA-801E-634DDDAF4B2B}" type="slidenum">
+              <a:rPr lang="en-US" smtClean="0"/>
+              <a:pPr/>
+              <a:t>‹#›</a:t>
             </a:fld>
-            <a:endParaRPr lang="fr-FR"/>
+            <a:endParaRPr lang="en-US"/>
           </a:p>
         </p:txBody>
       </p:sp>
     </p:spTree>
-    <p:extLst>
-      <p:ext uri="{BB962C8B-B14F-4D97-AF65-F5344CB8AC3E}">
-        <p14:creationId xmlns:p14="http://schemas.microsoft.com/office/powerpoint/2010/main" val="2514078595"/>
-      </p:ext>
-    </p:extLst>
   </p:cSld>
   <p:clrMapOvr>
     <a:masterClrMapping/>
@@ -2321,7 +2290,7 @@
 
 <file path=ppt/slideLayouts/slideLayout9.xml><?xml version="1.0" encoding="utf-8"?>
 <p:sldLayout xmlns:a="http://schemas.openxmlformats.org/drawingml/2006/main" xmlns:r="http://schemas.openxmlformats.org/officeDocument/2006/relationships" xmlns:p="http://schemas.openxmlformats.org/presentationml/2006/main" type="picTx" preserve="1">
-  <p:cSld name="Image avec légende">
+  <p:cSld name="Picture with Caption">
     <p:spTree>
       <p:nvGrpSpPr>
         <p:cNvPr id="1" name=""/>
@@ -2338,7 +2307,7 @@
       </p:grpSpPr>
       <p:sp>
         <p:nvSpPr>
-          <p:cNvPr id="2" name="Titre 1"/>
+          <p:cNvPr id="2" name="Title 1"/>
           <p:cNvSpPr>
             <a:spLocks noGrp="1"/>
           </p:cNvSpPr>
@@ -2361,16 +2330,16 @@
           </a:lstStyle>
           <a:p>
             <a:r>
-              <a:rPr lang="fr-FR" smtClean="0"/>
-              <a:t>Modifiez le style du titre</a:t>
-            </a:r>
-            <a:endParaRPr lang="fr-FR"/>
-          </a:p>
-        </p:txBody>
-      </p:sp>
-      <p:sp>
-        <p:nvSpPr>
-          <p:cNvPr id="3" name="Espace réservé pour une image  2"/>
+              <a:rPr lang="en-US" smtClean="0"/>
+              <a:t>Click to edit Master title style</a:t>
+            </a:r>
+            <a:endParaRPr lang="en-US"/>
+          </a:p>
+        </p:txBody>
+      </p:sp>
+      <p:sp>
+        <p:nvSpPr>
+          <p:cNvPr id="3" name="Picture Placeholder 2"/>
           <p:cNvSpPr>
             <a:spLocks noGrp="1"/>
           </p:cNvSpPr>
@@ -2425,13 +2394,13 @@
             </a:lvl9pPr>
           </a:lstStyle>
           <a:p>
-            <a:endParaRPr lang="fr-FR"/>
-          </a:p>
-        </p:txBody>
-      </p:sp>
-      <p:sp>
-        <p:nvSpPr>
-          <p:cNvPr id="4" name="Espace réservé du texte 3"/>
+            <a:endParaRPr lang="en-US"/>
+          </a:p>
+        </p:txBody>
+      </p:sp>
+      <p:sp>
+        <p:nvSpPr>
+          <p:cNvPr id="4" name="Text Placeholder 3"/>
           <p:cNvSpPr>
             <a:spLocks noGrp="1"/>
           </p:cNvSpPr>
@@ -2488,15 +2457,15 @@
           <a:p>
             <a:pPr lvl="0"/>
             <a:r>
-              <a:rPr lang="fr-FR" smtClean="0"/>
-              <a:t>Modifiez les styles du texte du masque</a:t>
-            </a:r>
-          </a:p>
-        </p:txBody>
-      </p:sp>
-      <p:sp>
-        <p:nvSpPr>
-          <p:cNvPr id="5" name="Espace réservé de la date 4"/>
+              <a:rPr lang="en-US" smtClean="0"/>
+              <a:t>Click to edit Master text styles</a:t>
+            </a:r>
+          </a:p>
+        </p:txBody>
+      </p:sp>
+      <p:sp>
+        <p:nvSpPr>
+          <p:cNvPr id="5" name="Date Placeholder 4"/>
           <p:cNvSpPr>
             <a:spLocks noGrp="1"/>
           </p:cNvSpPr>
@@ -2509,17 +2478,18 @@
           <a:bodyPr/>
           <a:lstStyle/>
           <a:p>
-            <a:fld id="{ACEF5093-F78E-4C54-92B5-273C64AB824F}" type="datetimeFigureOut">
-              <a:rPr lang="fr-FR" smtClean="0"/>
-              <a:t>13/11/2012</a:t>
+            <a:fld id="{1D8BD707-D9CF-40AE-B4C6-C98DA3205C09}" type="datetimeFigureOut">
+              <a:rPr lang="en-US" smtClean="0"/>
+              <a:pPr/>
+              <a:t>8/1/2011</a:t>
             </a:fld>
-            <a:endParaRPr lang="fr-FR"/>
-          </a:p>
-        </p:txBody>
-      </p:sp>
-      <p:sp>
-        <p:nvSpPr>
-          <p:cNvPr id="6" name="Espace réservé du pied de page 5"/>
+            <a:endParaRPr lang="en-US"/>
+          </a:p>
+        </p:txBody>
+      </p:sp>
+      <p:sp>
+        <p:nvSpPr>
+          <p:cNvPr id="6" name="Footer Placeholder 5"/>
           <p:cNvSpPr>
             <a:spLocks noGrp="1"/>
           </p:cNvSpPr>
@@ -2532,13 +2502,13 @@
           <a:bodyPr/>
           <a:lstStyle/>
           <a:p>
-            <a:endParaRPr lang="fr-FR"/>
-          </a:p>
-        </p:txBody>
-      </p:sp>
-      <p:sp>
-        <p:nvSpPr>
-          <p:cNvPr id="7" name="Espace réservé du numéro de diapositive 6"/>
+            <a:endParaRPr lang="en-US"/>
+          </a:p>
+        </p:txBody>
+      </p:sp>
+      <p:sp>
+        <p:nvSpPr>
+          <p:cNvPr id="7" name="Slide Number Placeholder 6"/>
           <p:cNvSpPr>
             <a:spLocks noGrp="1"/>
           </p:cNvSpPr>
@@ -2551,20 +2521,16 @@
           <a:bodyPr/>
           <a:lstStyle/>
           <a:p>
-            <a:fld id="{AB1FBAE0-DF1D-4016-913C-26E4459298C9}" type="slidenum">
-              <a:rPr lang="fr-FR" smtClean="0"/>
-              <a:t>‹N°›</a:t>
+            <a:fld id="{B6F15528-21DE-4FAA-801E-634DDDAF4B2B}" type="slidenum">
+              <a:rPr lang="en-US" smtClean="0"/>
+              <a:pPr/>
+              <a:t>‹#›</a:t>
             </a:fld>
-            <a:endParaRPr lang="fr-FR"/>
+            <a:endParaRPr lang="en-US"/>
           </a:p>
         </p:txBody>
       </p:sp>
     </p:spTree>
-    <p:extLst>
-      <p:ext uri="{BB962C8B-B14F-4D97-AF65-F5344CB8AC3E}">
-        <p14:creationId xmlns:p14="http://schemas.microsoft.com/office/powerpoint/2010/main" val="3052795200"/>
-      </p:ext>
-    </p:extLst>
   </p:cSld>
   <p:clrMapOvr>
     <a:masterClrMapping/>
@@ -2596,7 +2562,7 @@
       </p:grpSpPr>
       <p:sp>
         <p:nvSpPr>
-          <p:cNvPr id="2" name="Espace réservé du titre 1"/>
+          <p:cNvPr id="2" name="Title Placeholder 1"/>
           <p:cNvSpPr>
             <a:spLocks noGrp="1"/>
           </p:cNvSpPr>
@@ -2620,16 +2586,16 @@
           <a:lstStyle/>
           <a:p>
             <a:r>
-              <a:rPr lang="fr-FR" smtClean="0"/>
-              <a:t>Modifiez le style du titre</a:t>
-            </a:r>
-            <a:endParaRPr lang="fr-FR"/>
-          </a:p>
-        </p:txBody>
-      </p:sp>
-      <p:sp>
-        <p:nvSpPr>
-          <p:cNvPr id="3" name="Espace réservé du texte 2"/>
+              <a:rPr lang="en-US" smtClean="0"/>
+              <a:t>Click to edit Master title style</a:t>
+            </a:r>
+            <a:endParaRPr lang="en-US"/>
+          </a:p>
+        </p:txBody>
+      </p:sp>
+      <p:sp>
+        <p:nvSpPr>
+          <p:cNvPr id="3" name="Text Placeholder 2"/>
           <p:cNvSpPr>
             <a:spLocks noGrp="1"/>
           </p:cNvSpPr>
@@ -2654,44 +2620,44 @@
           <a:p>
             <a:pPr lvl="0"/>
             <a:r>
-              <a:rPr lang="fr-FR" smtClean="0"/>
-              <a:t>Modifiez les styles du texte du masque</a:t>
+              <a:rPr lang="en-US" smtClean="0"/>
+              <a:t>Click to edit Master text styles</a:t>
             </a:r>
           </a:p>
           <a:p>
             <a:pPr lvl="1"/>
             <a:r>
-              <a:rPr lang="fr-FR" smtClean="0"/>
-              <a:t>Deuxième niveau</a:t>
+              <a:rPr lang="en-US" smtClean="0"/>
+              <a:t>Second level</a:t>
             </a:r>
           </a:p>
           <a:p>
             <a:pPr lvl="2"/>
             <a:r>
-              <a:rPr lang="fr-FR" smtClean="0"/>
-              <a:t>Troisième niveau</a:t>
+              <a:rPr lang="en-US" smtClean="0"/>
+              <a:t>Third level</a:t>
             </a:r>
           </a:p>
           <a:p>
             <a:pPr lvl="3"/>
             <a:r>
-              <a:rPr lang="fr-FR" smtClean="0"/>
-              <a:t>Quatrième niveau</a:t>
+              <a:rPr lang="en-US" smtClean="0"/>
+              <a:t>Fourth level</a:t>
             </a:r>
           </a:p>
           <a:p>
             <a:pPr lvl="4"/>
             <a:r>
-              <a:rPr lang="fr-FR" smtClean="0"/>
-              <a:t>Cinquième niveau</a:t>
-            </a:r>
-            <a:endParaRPr lang="fr-FR"/>
-          </a:p>
-        </p:txBody>
-      </p:sp>
-      <p:sp>
-        <p:nvSpPr>
-          <p:cNvPr id="4" name="Espace réservé de la date 3"/>
+              <a:rPr lang="en-US" smtClean="0"/>
+              <a:t>Fifth level</a:t>
+            </a:r>
+            <a:endParaRPr lang="en-US"/>
+          </a:p>
+        </p:txBody>
+      </p:sp>
+      <p:sp>
+        <p:nvSpPr>
+          <p:cNvPr id="4" name="Date Placeholder 3"/>
           <p:cNvSpPr>
             <a:spLocks noGrp="1"/>
           </p:cNvSpPr>
@@ -2722,17 +2688,18 @@
             </a:lvl1pPr>
           </a:lstStyle>
           <a:p>
-            <a:fld id="{ACEF5093-F78E-4C54-92B5-273C64AB824F}" type="datetimeFigureOut">
-              <a:rPr lang="fr-FR" smtClean="0"/>
-              <a:t>13/11/2012</a:t>
+            <a:fld id="{1D8BD707-D9CF-40AE-B4C6-C98DA3205C09}" type="datetimeFigureOut">
+              <a:rPr lang="en-US" smtClean="0"/>
+              <a:pPr/>
+              <a:t>8/1/2011</a:t>
             </a:fld>
-            <a:endParaRPr lang="fr-FR"/>
-          </a:p>
-        </p:txBody>
-      </p:sp>
-      <p:sp>
-        <p:nvSpPr>
-          <p:cNvPr id="5" name="Espace réservé du pied de page 4"/>
+            <a:endParaRPr lang="en-US"/>
+          </a:p>
+        </p:txBody>
+      </p:sp>
+      <p:sp>
+        <p:nvSpPr>
+          <p:cNvPr id="5" name="Footer Placeholder 4"/>
           <p:cNvSpPr>
             <a:spLocks noGrp="1"/>
           </p:cNvSpPr>
@@ -2763,13 +2730,13 @@
             </a:lvl1pPr>
           </a:lstStyle>
           <a:p>
-            <a:endParaRPr lang="fr-FR"/>
-          </a:p>
-        </p:txBody>
-      </p:sp>
-      <p:sp>
-        <p:nvSpPr>
-          <p:cNvPr id="6" name="Espace réservé du numéro de diapositive 5"/>
+            <a:endParaRPr lang="en-US"/>
+          </a:p>
+        </p:txBody>
+      </p:sp>
+      <p:sp>
+        <p:nvSpPr>
+          <p:cNvPr id="6" name="Slide Number Placeholder 5"/>
           <p:cNvSpPr>
             <a:spLocks noGrp="1"/>
           </p:cNvSpPr>
@@ -2800,20 +2767,16 @@
             </a:lvl1pPr>
           </a:lstStyle>
           <a:p>
-            <a:fld id="{AB1FBAE0-DF1D-4016-913C-26E4459298C9}" type="slidenum">
-              <a:rPr lang="fr-FR" smtClean="0"/>
-              <a:t>‹N°›</a:t>
+            <a:fld id="{B6F15528-21DE-4FAA-801E-634DDDAF4B2B}" type="slidenum">
+              <a:rPr lang="en-US" smtClean="0"/>
+              <a:pPr/>
+              <a:t>‹#›</a:t>
             </a:fld>
-            <a:endParaRPr lang="fr-FR"/>
+            <a:endParaRPr lang="en-US"/>
           </a:p>
         </p:txBody>
       </p:sp>
     </p:spTree>
-    <p:extLst>
-      <p:ext uri="{BB962C8B-B14F-4D97-AF65-F5344CB8AC3E}">
-        <p14:creationId xmlns:p14="http://schemas.microsoft.com/office/powerpoint/2010/main" val="1484238316"/>
-      </p:ext>
-    </p:extLst>
   </p:cSld>
   <p:clrMap bg1="lt1" tx1="dk1" bg2="lt2" tx2="dk2" accent1="accent1" accent2="accent2" accent3="accent3" accent4="accent4" accent5="accent5" accent6="accent6" hlink="hlink" folHlink="folHlink"/>
   <p:sldLayoutIdLst>
@@ -2985,7 +2948,7 @@
     </p:bodyStyle>
     <p:otherStyle>
       <a:defPPr>
-        <a:defRPr lang="fr-FR"/>
+        <a:defRPr lang="en-US"/>
       </a:defPPr>
       <a:lvl1pPr marL="0" algn="l" defTabSz="914400" rtl="0" eaLnBrk="1" latinLnBrk="0" hangingPunct="1">
         <a:defRPr sz="1800" kern="1200">
@@ -3083,7 +3046,7 @@
 </file>
 
 <file path=ppt/slides/slide1.xml><?xml version="1.0" encoding="utf-8"?>
-<p:sld xmlns:a="http://schemas.openxmlformats.org/drawingml/2006/main" xmlns:r="http://schemas.openxmlformats.org/officeDocument/2006/relationships" xmlns:p="http://schemas.openxmlformats.org/presentationml/2006/main">
+<p:sld xmlns:p="http://schemas.openxmlformats.org/presentationml/2006/main" xmlns:a="http://schemas.openxmlformats.org/drawingml/2006/main">
   <p:cSld>
     <p:spTree>
       <p:nvGrpSpPr>
@@ -3101,728 +3064,149 @@
       </p:grpSpPr>
       <p:sp>
         <p:nvSpPr>
-          <p:cNvPr id="4" name="Rectangle 1"/>
-          <p:cNvSpPr>
-            <a:spLocks noChangeArrowheads="1"/>
-          </p:cNvSpPr>
+          <p:cNvPr name="TextBox 2" id="2"/>
+          <p:cNvSpPr txBox="true"/>
           <p:nvPr/>
         </p:nvSpPr>
-        <p:spPr bwMode="auto">
+        <p:spPr>
           <a:xfrm>
-            <a:off x="-252536" y="476672"/>
-            <a:ext cx="9144000" cy="4524315"/>
+            <a:off x="635000" y="127000"/>
+            <a:ext cx="10922000" cy="508000"/>
           </a:xfrm>
           <a:prstGeom prst="rect">
             <a:avLst/>
           </a:prstGeom>
-          <a:noFill/>
-          <a:ln>
-            <a:noFill/>
-          </a:ln>
-          <a:effectLst/>
-          <a:extLst>
-            <a:ext uri="{909E8E84-426E-40DD-AFC4-6F175D3DCCD1}">
-              <a14:hiddenFill xmlns:a14="http://schemas.microsoft.com/office/drawing/2010/main">
-                <a:solidFill>
-                  <a:schemeClr val="accent1"/>
-                </a:solidFill>
-              </a14:hiddenFill>
-            </a:ext>
-            <a:ext uri="{91240B29-F687-4F45-9708-019B960494DF}">
-              <a14:hiddenLine xmlns:a14="http://schemas.microsoft.com/office/drawing/2010/main" w="9525">
-                <a:solidFill>
-                  <a:schemeClr val="tx1"/>
-                </a:solidFill>
-                <a:miter lim="800000"/>
-                <a:headEnd/>
-                <a:tailEnd/>
-              </a14:hiddenLine>
-            </a:ext>
-            <a:ext uri="{AF507438-7753-43E0-B8FC-AC1667EBCBE1}">
-              <a14:hiddenEffects xmlns:a14="http://schemas.microsoft.com/office/drawing/2010/main">
-                <a:effectLst>
-                  <a:outerShdw dist="35921" dir="2700000" algn="ctr" rotWithShape="0">
-                    <a:schemeClr val="bg2"/>
-                  </a:outerShdw>
-                </a:effectLst>
-              </a14:hiddenEffects>
-            </a:ext>
-          </a:extLst>
         </p:spPr>
         <p:txBody>
-          <a:bodyPr vert="horz" wrap="square" lIns="91440" tIns="45720" rIns="91440" bIns="45720" numCol="1" anchor="ctr" anchorCtr="0" compatLnSpc="1">
-            <a:prstTxWarp prst="textNoShape">
-              <a:avLst/>
-            </a:prstTxWarp>
-            <a:spAutoFit/>
-          </a:bodyPr>
-          <a:lstStyle/>
-          <a:p>
-            <a:pPr marL="0" marR="0" lvl="0" indent="0" algn="ctr" defTabSz="914400" rtl="0" eaLnBrk="1" fontAlgn="base" latinLnBrk="0" hangingPunct="1">
-              <a:lnSpc>
-                <a:spcPct val="100000"/>
-              </a:lnSpc>
-              <a:spcBef>
-                <a:spcPct val="0"/>
-              </a:spcBef>
-              <a:spcAft>
-                <a:spcPct val="0"/>
-              </a:spcAft>
-              <a:buClrTx/>
-              <a:buSzTx/>
-              <a:buFontTx/>
-              <a:buNone/>
-              <a:tabLst/>
+          <a:bodyPr anchor="t" rtlCol="false"/>
+          <a:lstStyle/>
+          <a:p>
+            <a:pPr algn="l">
+              <a:defRPr/>
             </a:pPr>
             <a:r>
-              <a:rPr kumimoji="0" lang="en-GB" sz="4800" b="0" i="0" u="none" strike="noStrike" cap="none" normalizeH="0" baseline="0" dirty="0" err="1" smtClean="0">
-                <a:ln>
-                  <a:noFill/>
-                </a:ln>
-                <a:solidFill>
-                  <a:schemeClr val="tx1"/>
-                </a:solidFill>
-                <a:effectLst/>
-                <a:latin typeface="Franklin Gothic Demi" pitchFamily="34" charset="0"/>
-                <a:cs typeface="Times New Roman" pitchFamily="18" charset="0"/>
+              <a:rPr lang="fr-MG"/>
+              <a:t/>
+            </a:r>
+            <a:endParaRPr lang="en-US" sz="1100"/>
+          </a:p>
+          <a:p>
+            <a:pPr algn="ctr"/>
+            <a:r>
+              <a:rPr lang="en-US" sz="3200" b="true">
+                <a:solidFill>
+                  <a:srgbClr val="0000FF"/>
+                </a:solidFill>
+                <a:latin typeface="Verdana"/>
               </a:rPr>
-              <a:t>Jesosy</a:t>
-            </a:r>
-            <a:r>
-              <a:rPr kumimoji="0" lang="en-GB" sz="4800" b="0" i="0" u="none" strike="noStrike" cap="none" normalizeH="0" baseline="0" dirty="0" smtClean="0">
-                <a:ln>
-                  <a:noFill/>
-                </a:ln>
-                <a:solidFill>
-                  <a:schemeClr val="tx1"/>
-                </a:solidFill>
-                <a:effectLst/>
-                <a:latin typeface="Franklin Gothic Demi" pitchFamily="34" charset="0"/>
-                <a:cs typeface="Times New Roman" pitchFamily="18" charset="0"/>
+              <a:t>HIRA 43</a:t>
+            </a:r>
+          </a:p>
+        </p:txBody>
+      </p:sp>
+      <p:sp>
+        <p:nvSpPr>
+          <p:cNvPr name="TextBox 3" id="3"/>
+          <p:cNvSpPr txBox="true"/>
+          <p:nvPr/>
+        </p:nvSpPr>
+        <p:spPr>
+          <a:xfrm>
+            <a:off x="635000" y="762000"/>
+            <a:ext cx="10922000" cy="5588000"/>
+          </a:xfrm>
+          <a:prstGeom prst="rect">
+            <a:avLst/>
+          </a:prstGeom>
+        </p:spPr>
+        <p:txBody>
+          <a:bodyPr anchor="t" rtlCol="false"/>
+          <a:lstStyle/>
+          <a:p>
+            <a:pPr algn="l">
+              <a:defRPr/>
+            </a:pPr>
+            <a:r>
+              <a:rPr lang="fr-MG"/>
+              <a:t/>
+            </a:r>
+            <a:endParaRPr lang="en-US" sz="1100"/>
+          </a:p>
+          <a:p>
+            <a:pPr algn="ctr"/>
+            <a:r>
+              <a:rPr lang="en-US" sz="4500" b="true">
+                <a:solidFill>
+                  <a:srgbClr val="000000"/>
+                </a:solidFill>
+                <a:latin typeface="Verdana"/>
               </a:rPr>
-              <a:t> </a:t>
-            </a:r>
-            <a:r>
-              <a:rPr kumimoji="0" lang="en-GB" sz="4800" b="0" i="0" u="none" strike="noStrike" cap="none" normalizeH="0" baseline="0" dirty="0" err="1" smtClean="0">
-                <a:ln>
-                  <a:noFill/>
-                </a:ln>
-                <a:solidFill>
-                  <a:schemeClr val="tx1"/>
-                </a:solidFill>
-                <a:effectLst/>
-                <a:latin typeface="Franklin Gothic Demi" pitchFamily="34" charset="0"/>
-                <a:cs typeface="Times New Roman" pitchFamily="18" charset="0"/>
+              <a:t>Jesosy Tompo miantso anao</a:t>
+            </a:r>
+          </a:p>
+          <a:p>
+            <a:pPr algn="ctr"/>
+            <a:r>
+              <a:rPr lang="en-US" sz="4500" b="true">
+                <a:solidFill>
+                  <a:srgbClr val="000000"/>
+                </a:solidFill>
+                <a:latin typeface="Verdana"/>
               </a:rPr>
-              <a:t>Tompo</a:t>
-            </a:r>
-            <a:r>
-              <a:rPr kumimoji="0" lang="en-GB" sz="4800" b="0" i="0" u="none" strike="noStrike" cap="none" normalizeH="0" baseline="0" dirty="0" smtClean="0">
-                <a:ln>
-                  <a:noFill/>
-                </a:ln>
-                <a:solidFill>
-                  <a:schemeClr val="tx1"/>
-                </a:solidFill>
-                <a:effectLst/>
-                <a:latin typeface="Franklin Gothic Demi" pitchFamily="34" charset="0"/>
-                <a:cs typeface="Times New Roman" pitchFamily="18" charset="0"/>
+              <a:t>Manontany izao</a:t>
+            </a:r>
+          </a:p>
+          <a:p>
+            <a:pPr algn="ctr"/>
+            <a:r>
+              <a:rPr lang="en-US" sz="4500" b="true">
+                <a:solidFill>
+                  <a:srgbClr val="000000"/>
+                </a:solidFill>
+                <a:latin typeface="Verdana"/>
               </a:rPr>
-              <a:t> </a:t>
-            </a:r>
-            <a:r>
-              <a:rPr kumimoji="0" lang="en-GB" sz="4800" b="0" i="0" u="none" strike="noStrike" cap="none" normalizeH="0" baseline="0" dirty="0" err="1" smtClean="0">
-                <a:ln>
-                  <a:noFill/>
-                </a:ln>
-                <a:solidFill>
-                  <a:schemeClr val="tx1"/>
-                </a:solidFill>
-                <a:effectLst/>
-                <a:latin typeface="Franklin Gothic Demi" pitchFamily="34" charset="0"/>
-                <a:cs typeface="Times New Roman" pitchFamily="18" charset="0"/>
+              <a:t>“Aiza moa ianao ?”</a:t>
+            </a:r>
+          </a:p>
+          <a:p>
+            <a:pPr algn="ctr"/>
+            <a:r>
+              <a:rPr lang="en-US" sz="4500" b="true">
+                <a:solidFill>
+                  <a:srgbClr val="000000"/>
+                </a:solidFill>
+                <a:latin typeface="Verdana"/>
               </a:rPr>
-              <a:t>miantso</a:t>
-            </a:r>
-            <a:r>
-              <a:rPr kumimoji="0" lang="en-GB" sz="4800" b="0" i="0" u="none" strike="noStrike" cap="none" normalizeH="0" baseline="0" dirty="0" smtClean="0">
-                <a:ln>
-                  <a:noFill/>
-                </a:ln>
-                <a:solidFill>
-                  <a:schemeClr val="tx1"/>
-                </a:solidFill>
-                <a:effectLst/>
-                <a:latin typeface="Franklin Gothic Demi" pitchFamily="34" charset="0"/>
-                <a:cs typeface="Times New Roman" pitchFamily="18" charset="0"/>
+              <a:t>Ny ondrikelinao noana indreo</a:t>
+            </a:r>
+          </a:p>
+          <a:p>
+            <a:pPr algn="ctr"/>
+            <a:r>
+              <a:rPr lang="en-US" sz="4500" b="true">
+                <a:solidFill>
+                  <a:srgbClr val="000000"/>
+                </a:solidFill>
+                <a:latin typeface="Verdana"/>
               </a:rPr>
-              <a:t> </a:t>
-            </a:r>
-            <a:r>
-              <a:rPr kumimoji="0" lang="en-GB" sz="4800" b="0" i="0" u="none" strike="noStrike" cap="none" normalizeH="0" baseline="0" dirty="0" err="1" smtClean="0">
-                <a:ln>
-                  <a:noFill/>
-                </a:ln>
-                <a:solidFill>
-                  <a:schemeClr val="tx1"/>
-                </a:solidFill>
-                <a:effectLst/>
-                <a:latin typeface="Franklin Gothic Demi" pitchFamily="34" charset="0"/>
-                <a:cs typeface="Times New Roman" pitchFamily="18" charset="0"/>
+              <a:t>Miandry anao re ireo</a:t>
+            </a:r>
+          </a:p>
+          <a:p>
+            <a:pPr algn="ctr"/>
+            <a:r>
+              <a:rPr lang="en-US" sz="4500" b="true">
+                <a:solidFill>
+                  <a:srgbClr val="000000"/>
+                </a:solidFill>
+                <a:latin typeface="Verdana"/>
               </a:rPr>
-              <a:t>anao</a:t>
-            </a:r>
-            <a:endParaRPr kumimoji="0" lang="en-GB" sz="4800" b="0" i="0" u="none" strike="noStrike" cap="none" normalizeH="0" baseline="0" dirty="0" smtClean="0">
-              <a:ln>
-                <a:noFill/>
-              </a:ln>
-              <a:solidFill>
-                <a:schemeClr val="tx1"/>
-              </a:solidFill>
-              <a:effectLst/>
-              <a:latin typeface="Franklin Gothic Demi" pitchFamily="34" charset="0"/>
-            </a:endParaRPr>
-          </a:p>
-          <a:p>
-            <a:pPr marL="0" marR="0" lvl="0" indent="0" algn="ctr" defTabSz="914400" rtl="0" eaLnBrk="0" fontAlgn="base" latinLnBrk="0" hangingPunct="0">
-              <a:lnSpc>
-                <a:spcPct val="100000"/>
-              </a:lnSpc>
-              <a:spcBef>
-                <a:spcPct val="0"/>
-              </a:spcBef>
-              <a:spcAft>
-                <a:spcPct val="0"/>
-              </a:spcAft>
-              <a:buClrTx/>
-              <a:buSzTx/>
-              <a:buFontTx/>
-              <a:buNone/>
-              <a:tabLst/>
-            </a:pPr>
-            <a:r>
-              <a:rPr kumimoji="0" lang="en-GB" sz="4800" b="0" i="0" u="none" strike="noStrike" cap="none" normalizeH="0" baseline="0" dirty="0" smtClean="0">
-                <a:ln>
-                  <a:noFill/>
-                </a:ln>
-                <a:solidFill>
-                  <a:schemeClr val="tx1"/>
-                </a:solidFill>
-                <a:effectLst/>
-                <a:latin typeface="Franklin Gothic Demi" pitchFamily="34" charset="0"/>
-                <a:cs typeface="Times New Roman" pitchFamily="18" charset="0"/>
-              </a:rPr>
-              <a:t>   </a:t>
-            </a:r>
-            <a:r>
-              <a:rPr kumimoji="0" lang="en-GB" sz="4800" b="0" i="0" u="none" strike="noStrike" cap="none" normalizeH="0" baseline="0" dirty="0" err="1" smtClean="0">
-                <a:ln>
-                  <a:noFill/>
-                </a:ln>
-                <a:solidFill>
-                  <a:schemeClr val="tx1"/>
-                </a:solidFill>
-                <a:effectLst/>
-                <a:latin typeface="Franklin Gothic Demi" pitchFamily="34" charset="0"/>
-                <a:cs typeface="Times New Roman" pitchFamily="18" charset="0"/>
-              </a:rPr>
-              <a:t>Manontany</a:t>
-            </a:r>
-            <a:r>
-              <a:rPr kumimoji="0" lang="en-GB" sz="4800" b="0" i="0" u="none" strike="noStrike" cap="none" normalizeH="0" baseline="0" dirty="0" smtClean="0">
-                <a:ln>
-                  <a:noFill/>
-                </a:ln>
-                <a:solidFill>
-                  <a:schemeClr val="tx1"/>
-                </a:solidFill>
-                <a:effectLst/>
-                <a:latin typeface="Franklin Gothic Demi" pitchFamily="34" charset="0"/>
-                <a:cs typeface="Times New Roman" pitchFamily="18" charset="0"/>
-              </a:rPr>
-              <a:t> </a:t>
-            </a:r>
-            <a:r>
-              <a:rPr kumimoji="0" lang="en-GB" sz="4800" b="0" i="0" u="none" strike="noStrike" cap="none" normalizeH="0" baseline="0" dirty="0" err="1" smtClean="0">
-                <a:ln>
-                  <a:noFill/>
-                </a:ln>
-                <a:solidFill>
-                  <a:schemeClr val="tx1"/>
-                </a:solidFill>
-                <a:effectLst/>
-                <a:latin typeface="Franklin Gothic Demi" pitchFamily="34" charset="0"/>
-                <a:cs typeface="Times New Roman" pitchFamily="18" charset="0"/>
-              </a:rPr>
-              <a:t>izao</a:t>
-            </a:r>
-            <a:endParaRPr kumimoji="0" lang="en-GB" sz="4800" b="0" i="0" u="none" strike="noStrike" cap="none" normalizeH="0" baseline="0" dirty="0" smtClean="0">
-              <a:ln>
-                <a:noFill/>
-              </a:ln>
-              <a:solidFill>
-                <a:schemeClr val="tx1"/>
-              </a:solidFill>
-              <a:effectLst/>
-              <a:latin typeface="Franklin Gothic Demi" pitchFamily="34" charset="0"/>
-            </a:endParaRPr>
-          </a:p>
-          <a:p>
-            <a:pPr marL="0" marR="0" lvl="0" indent="0" algn="ctr" defTabSz="914400" rtl="0" eaLnBrk="0" fontAlgn="base" latinLnBrk="0" hangingPunct="0">
-              <a:lnSpc>
-                <a:spcPct val="100000"/>
-              </a:lnSpc>
-              <a:spcBef>
-                <a:spcPct val="0"/>
-              </a:spcBef>
-              <a:spcAft>
-                <a:spcPct val="0"/>
-              </a:spcAft>
-              <a:buClrTx/>
-              <a:buSzTx/>
-              <a:buFontTx/>
-              <a:buNone/>
-              <a:tabLst/>
-            </a:pPr>
-            <a:r>
-              <a:rPr kumimoji="0" lang="en-GB" sz="4800" b="0" i="0" u="none" strike="noStrike" cap="none" normalizeH="0" baseline="0" dirty="0" smtClean="0">
-                <a:ln>
-                  <a:noFill/>
-                </a:ln>
-                <a:solidFill>
-                  <a:schemeClr val="tx1"/>
-                </a:solidFill>
-                <a:effectLst/>
-                <a:latin typeface="Franklin Gothic Demi" pitchFamily="34" charset="0"/>
-                <a:cs typeface="Times New Roman" pitchFamily="18" charset="0"/>
-              </a:rPr>
-              <a:t>   “</a:t>
-            </a:r>
-            <a:r>
-              <a:rPr kumimoji="0" lang="en-GB" sz="4800" b="0" i="0" u="none" strike="noStrike" cap="none" normalizeH="0" baseline="0" dirty="0" err="1" smtClean="0">
-                <a:ln>
-                  <a:noFill/>
-                </a:ln>
-                <a:solidFill>
-                  <a:schemeClr val="tx1"/>
-                </a:solidFill>
-                <a:effectLst/>
-                <a:latin typeface="Franklin Gothic Demi" pitchFamily="34" charset="0"/>
-                <a:cs typeface="Times New Roman" pitchFamily="18" charset="0"/>
-              </a:rPr>
-              <a:t>Aiza</a:t>
-            </a:r>
-            <a:r>
-              <a:rPr kumimoji="0" lang="en-GB" sz="4800" b="0" i="0" u="none" strike="noStrike" cap="none" normalizeH="0" baseline="0" dirty="0" smtClean="0">
-                <a:ln>
-                  <a:noFill/>
-                </a:ln>
-                <a:solidFill>
-                  <a:schemeClr val="tx1"/>
-                </a:solidFill>
-                <a:effectLst/>
-                <a:latin typeface="Franklin Gothic Demi" pitchFamily="34" charset="0"/>
-                <a:cs typeface="Times New Roman" pitchFamily="18" charset="0"/>
-              </a:rPr>
-              <a:t> moa </a:t>
-            </a:r>
-            <a:r>
-              <a:rPr kumimoji="0" lang="en-GB" sz="4800" b="0" i="0" u="none" strike="noStrike" cap="none" normalizeH="0" baseline="0" dirty="0" err="1" smtClean="0">
-                <a:ln>
-                  <a:noFill/>
-                </a:ln>
-                <a:solidFill>
-                  <a:schemeClr val="tx1"/>
-                </a:solidFill>
-                <a:effectLst/>
-                <a:latin typeface="Franklin Gothic Demi" pitchFamily="34" charset="0"/>
-                <a:cs typeface="Times New Roman" pitchFamily="18" charset="0"/>
-              </a:rPr>
-              <a:t>ianao</a:t>
-            </a:r>
-            <a:r>
-              <a:rPr kumimoji="0" lang="en-GB" sz="4800" b="0" i="0" u="none" strike="noStrike" cap="none" normalizeH="0" baseline="0" dirty="0" smtClean="0">
-                <a:ln>
-                  <a:noFill/>
-                </a:ln>
-                <a:solidFill>
-                  <a:schemeClr val="tx1"/>
-                </a:solidFill>
-                <a:effectLst/>
-                <a:latin typeface="Franklin Gothic Demi" pitchFamily="34" charset="0"/>
-                <a:cs typeface="Times New Roman" pitchFamily="18" charset="0"/>
-              </a:rPr>
-              <a:t> ?”</a:t>
-            </a:r>
-            <a:endParaRPr kumimoji="0" lang="en-GB" sz="4800" b="0" i="0" u="none" strike="noStrike" cap="none" normalizeH="0" baseline="0" dirty="0" smtClean="0">
-              <a:ln>
-                <a:noFill/>
-              </a:ln>
-              <a:solidFill>
-                <a:schemeClr val="tx1"/>
-              </a:solidFill>
-              <a:effectLst/>
-              <a:latin typeface="Franklin Gothic Demi" pitchFamily="34" charset="0"/>
-            </a:endParaRPr>
-          </a:p>
-          <a:p>
-            <a:pPr marL="0" marR="0" lvl="0" indent="0" algn="ctr" defTabSz="914400" rtl="0" eaLnBrk="0" fontAlgn="base" latinLnBrk="0" hangingPunct="0">
-              <a:lnSpc>
-                <a:spcPct val="100000"/>
-              </a:lnSpc>
-              <a:spcBef>
-                <a:spcPct val="0"/>
-              </a:spcBef>
-              <a:spcAft>
-                <a:spcPct val="0"/>
-              </a:spcAft>
-              <a:buClrTx/>
-              <a:buSzTx/>
-              <a:buFontTx/>
-              <a:buNone/>
-              <a:tabLst/>
-            </a:pPr>
-            <a:r>
-              <a:rPr kumimoji="0" lang="en-GB" sz="4800" b="0" i="0" u="none" strike="noStrike" cap="none" normalizeH="0" baseline="0" dirty="0" smtClean="0">
-                <a:ln>
-                  <a:noFill/>
-                </a:ln>
-                <a:solidFill>
-                  <a:schemeClr val="tx1"/>
-                </a:solidFill>
-                <a:effectLst/>
-                <a:latin typeface="Franklin Gothic Demi" pitchFamily="34" charset="0"/>
-                <a:cs typeface="Times New Roman" pitchFamily="18" charset="0"/>
-              </a:rPr>
-              <a:t>   </a:t>
-            </a:r>
-            <a:r>
-              <a:rPr kumimoji="0" lang="en-GB" sz="4800" b="0" i="0" u="none" strike="noStrike" cap="none" normalizeH="0" baseline="0" dirty="0" err="1" smtClean="0">
-                <a:ln>
-                  <a:noFill/>
-                </a:ln>
-                <a:solidFill>
-                  <a:schemeClr val="tx1"/>
-                </a:solidFill>
-                <a:effectLst/>
-                <a:latin typeface="Franklin Gothic Demi" pitchFamily="34" charset="0"/>
-                <a:cs typeface="Times New Roman" pitchFamily="18" charset="0"/>
-              </a:rPr>
-              <a:t>Ny</a:t>
-            </a:r>
-            <a:r>
-              <a:rPr kumimoji="0" lang="en-GB" sz="4800" b="0" i="0" u="none" strike="noStrike" cap="none" normalizeH="0" baseline="0" dirty="0" smtClean="0">
-                <a:ln>
-                  <a:noFill/>
-                </a:ln>
-                <a:solidFill>
-                  <a:schemeClr val="tx1"/>
-                </a:solidFill>
-                <a:effectLst/>
-                <a:latin typeface="Franklin Gothic Demi" pitchFamily="34" charset="0"/>
-                <a:cs typeface="Times New Roman" pitchFamily="18" charset="0"/>
-              </a:rPr>
-              <a:t> </a:t>
-            </a:r>
-            <a:r>
-              <a:rPr kumimoji="0" lang="en-GB" sz="4800" b="0" i="0" u="none" strike="noStrike" cap="none" normalizeH="0" baseline="0" dirty="0" err="1" smtClean="0">
-                <a:ln>
-                  <a:noFill/>
-                </a:ln>
-                <a:solidFill>
-                  <a:schemeClr val="tx1"/>
-                </a:solidFill>
-                <a:effectLst/>
-                <a:latin typeface="Franklin Gothic Demi" pitchFamily="34" charset="0"/>
-                <a:cs typeface="Times New Roman" pitchFamily="18" charset="0"/>
-              </a:rPr>
-              <a:t>ondrikelinao</a:t>
-            </a:r>
-            <a:r>
-              <a:rPr kumimoji="0" lang="en-GB" sz="4800" b="0" i="0" u="none" strike="noStrike" cap="none" normalizeH="0" baseline="0" dirty="0" smtClean="0">
-                <a:ln>
-                  <a:noFill/>
-                </a:ln>
-                <a:solidFill>
-                  <a:schemeClr val="tx1"/>
-                </a:solidFill>
-                <a:effectLst/>
-                <a:latin typeface="Franklin Gothic Demi" pitchFamily="34" charset="0"/>
-                <a:cs typeface="Times New Roman" pitchFamily="18" charset="0"/>
-              </a:rPr>
-              <a:t> </a:t>
-            </a:r>
-            <a:r>
-              <a:rPr kumimoji="0" lang="en-GB" sz="4800" b="0" i="0" u="none" strike="noStrike" cap="none" normalizeH="0" baseline="0" dirty="0" err="1" smtClean="0">
-                <a:ln>
-                  <a:noFill/>
-                </a:ln>
-                <a:solidFill>
-                  <a:schemeClr val="tx1"/>
-                </a:solidFill>
-                <a:effectLst/>
-                <a:latin typeface="Franklin Gothic Demi" pitchFamily="34" charset="0"/>
-                <a:cs typeface="Times New Roman" pitchFamily="18" charset="0"/>
-              </a:rPr>
-              <a:t>noana</a:t>
-            </a:r>
-            <a:r>
-              <a:rPr kumimoji="0" lang="en-GB" sz="4800" b="0" i="0" u="none" strike="noStrike" cap="none" normalizeH="0" baseline="0" dirty="0" smtClean="0">
-                <a:ln>
-                  <a:noFill/>
-                </a:ln>
-                <a:solidFill>
-                  <a:schemeClr val="tx1"/>
-                </a:solidFill>
-                <a:effectLst/>
-                <a:latin typeface="Franklin Gothic Demi" pitchFamily="34" charset="0"/>
-                <a:cs typeface="Times New Roman" pitchFamily="18" charset="0"/>
-              </a:rPr>
-              <a:t> </a:t>
-            </a:r>
-            <a:r>
-              <a:rPr kumimoji="0" lang="en-GB" sz="4800" b="0" i="0" u="none" strike="noStrike" cap="none" normalizeH="0" baseline="0" dirty="0" err="1" smtClean="0">
-                <a:ln>
-                  <a:noFill/>
-                </a:ln>
-                <a:solidFill>
-                  <a:schemeClr val="tx1"/>
-                </a:solidFill>
-                <a:effectLst/>
-                <a:latin typeface="Franklin Gothic Demi" pitchFamily="34" charset="0"/>
-                <a:cs typeface="Times New Roman" pitchFamily="18" charset="0"/>
-              </a:rPr>
-              <a:t>indreo</a:t>
-            </a:r>
-            <a:endParaRPr kumimoji="0" lang="en-GB" sz="4800" b="0" i="0" u="none" strike="noStrike" cap="none" normalizeH="0" baseline="0" dirty="0" smtClean="0">
-              <a:ln>
-                <a:noFill/>
-              </a:ln>
-              <a:solidFill>
-                <a:schemeClr val="tx1"/>
-              </a:solidFill>
-              <a:effectLst/>
-              <a:latin typeface="Franklin Gothic Demi" pitchFamily="34" charset="0"/>
-            </a:endParaRPr>
-          </a:p>
-          <a:p>
-            <a:pPr marL="0" marR="0" lvl="0" indent="0" algn="ctr" defTabSz="914400" rtl="0" eaLnBrk="0" fontAlgn="base" latinLnBrk="0" hangingPunct="0">
-              <a:lnSpc>
-                <a:spcPct val="100000"/>
-              </a:lnSpc>
-              <a:spcBef>
-                <a:spcPct val="0"/>
-              </a:spcBef>
-              <a:spcAft>
-                <a:spcPct val="0"/>
-              </a:spcAft>
-              <a:buClrTx/>
-              <a:buSzTx/>
-              <a:buFontTx/>
-              <a:buNone/>
-              <a:tabLst/>
-            </a:pPr>
-            <a:r>
-              <a:rPr kumimoji="0" lang="en-GB" sz="4800" b="0" i="0" u="none" strike="noStrike" cap="none" normalizeH="0" baseline="0" dirty="0" smtClean="0">
-                <a:ln>
-                  <a:noFill/>
-                </a:ln>
-                <a:solidFill>
-                  <a:schemeClr val="tx1"/>
-                </a:solidFill>
-                <a:effectLst/>
-                <a:latin typeface="Franklin Gothic Demi" pitchFamily="34" charset="0"/>
-                <a:cs typeface="Times New Roman" pitchFamily="18" charset="0"/>
-              </a:rPr>
-              <a:t>   </a:t>
-            </a:r>
-            <a:r>
-              <a:rPr kumimoji="0" lang="en-GB" sz="4800" b="0" i="0" u="none" strike="noStrike" cap="none" normalizeH="0" baseline="0" dirty="0" err="1" smtClean="0">
-                <a:ln>
-                  <a:noFill/>
-                </a:ln>
-                <a:solidFill>
-                  <a:schemeClr val="tx1"/>
-                </a:solidFill>
-                <a:effectLst/>
-                <a:latin typeface="Franklin Gothic Demi" pitchFamily="34" charset="0"/>
-                <a:cs typeface="Times New Roman" pitchFamily="18" charset="0"/>
-              </a:rPr>
-              <a:t>Miandry</a:t>
-            </a:r>
-            <a:r>
-              <a:rPr kumimoji="0" lang="en-GB" sz="4800" b="0" i="0" u="none" strike="noStrike" cap="none" normalizeH="0" baseline="0" dirty="0" smtClean="0">
-                <a:ln>
-                  <a:noFill/>
-                </a:ln>
-                <a:solidFill>
-                  <a:schemeClr val="tx1"/>
-                </a:solidFill>
-                <a:effectLst/>
-                <a:latin typeface="Franklin Gothic Demi" pitchFamily="34" charset="0"/>
-                <a:cs typeface="Times New Roman" pitchFamily="18" charset="0"/>
-              </a:rPr>
-              <a:t> </a:t>
-            </a:r>
-            <a:r>
-              <a:rPr kumimoji="0" lang="en-GB" sz="4800" b="0" i="0" u="none" strike="noStrike" cap="none" normalizeH="0" baseline="0" dirty="0" err="1" smtClean="0">
-                <a:ln>
-                  <a:noFill/>
-                </a:ln>
-                <a:solidFill>
-                  <a:schemeClr val="tx1"/>
-                </a:solidFill>
-                <a:effectLst/>
-                <a:latin typeface="Franklin Gothic Demi" pitchFamily="34" charset="0"/>
-                <a:cs typeface="Times New Roman" pitchFamily="18" charset="0"/>
-              </a:rPr>
-              <a:t>anao</a:t>
-            </a:r>
-            <a:r>
-              <a:rPr kumimoji="0" lang="en-GB" sz="4800" b="0" i="0" u="none" strike="noStrike" cap="none" normalizeH="0" baseline="0" dirty="0" smtClean="0">
-                <a:ln>
-                  <a:noFill/>
-                </a:ln>
-                <a:solidFill>
-                  <a:schemeClr val="tx1"/>
-                </a:solidFill>
-                <a:effectLst/>
-                <a:latin typeface="Franklin Gothic Demi" pitchFamily="34" charset="0"/>
-                <a:cs typeface="Times New Roman" pitchFamily="18" charset="0"/>
-              </a:rPr>
-              <a:t> re </a:t>
-            </a:r>
-            <a:r>
-              <a:rPr kumimoji="0" lang="en-GB" sz="4800" b="0" i="0" u="none" strike="noStrike" cap="none" normalizeH="0" baseline="0" dirty="0" err="1" smtClean="0">
-                <a:ln>
-                  <a:noFill/>
-                </a:ln>
-                <a:solidFill>
-                  <a:schemeClr val="tx1"/>
-                </a:solidFill>
-                <a:effectLst/>
-                <a:latin typeface="Franklin Gothic Demi" pitchFamily="34" charset="0"/>
-                <a:cs typeface="Times New Roman" pitchFamily="18" charset="0"/>
-              </a:rPr>
-              <a:t>ireo</a:t>
-            </a:r>
-            <a:endParaRPr kumimoji="0" lang="en-GB" sz="4800" b="0" i="0" u="none" strike="noStrike" cap="none" normalizeH="0" baseline="0" dirty="0" smtClean="0">
-              <a:ln>
-                <a:noFill/>
-              </a:ln>
-              <a:solidFill>
-                <a:schemeClr val="tx1"/>
-              </a:solidFill>
-              <a:effectLst/>
-              <a:latin typeface="Franklin Gothic Demi" pitchFamily="34" charset="0"/>
-            </a:endParaRPr>
-          </a:p>
-          <a:p>
-            <a:pPr marL="0" marR="0" lvl="0" indent="0" algn="ctr" defTabSz="914400" rtl="0" eaLnBrk="0" fontAlgn="base" latinLnBrk="0" hangingPunct="0">
-              <a:lnSpc>
-                <a:spcPct val="100000"/>
-              </a:lnSpc>
-              <a:spcBef>
-                <a:spcPct val="0"/>
-              </a:spcBef>
-              <a:spcAft>
-                <a:spcPct val="0"/>
-              </a:spcAft>
-              <a:buClrTx/>
-              <a:buSzTx/>
-              <a:buFontTx/>
-              <a:buNone/>
-              <a:tabLst/>
-            </a:pPr>
-            <a:r>
-              <a:rPr kumimoji="0" lang="en-GB" sz="4800" b="0" i="0" u="none" strike="noStrike" cap="none" normalizeH="0" baseline="0" dirty="0" smtClean="0">
-                <a:ln>
-                  <a:noFill/>
-                </a:ln>
-                <a:solidFill>
-                  <a:schemeClr val="tx1"/>
-                </a:solidFill>
-                <a:effectLst/>
-                <a:latin typeface="Franklin Gothic Demi" pitchFamily="34" charset="0"/>
-                <a:cs typeface="Times New Roman" pitchFamily="18" charset="0"/>
-              </a:rPr>
-              <a:t>   “</a:t>
-            </a:r>
-            <a:r>
-              <a:rPr kumimoji="0" lang="en-GB" sz="4800" b="0" i="0" u="none" strike="noStrike" cap="none" normalizeH="0" baseline="0" dirty="0" err="1" smtClean="0">
-                <a:ln>
-                  <a:noFill/>
-                </a:ln>
-                <a:solidFill>
-                  <a:schemeClr val="tx1"/>
-                </a:solidFill>
-                <a:effectLst/>
-                <a:latin typeface="Franklin Gothic Demi" pitchFamily="34" charset="0"/>
-                <a:cs typeface="Times New Roman" pitchFamily="18" charset="0"/>
-              </a:rPr>
-              <a:t>Aiza</a:t>
-            </a:r>
-            <a:r>
-              <a:rPr kumimoji="0" lang="en-GB" sz="4800" b="0" i="0" u="none" strike="noStrike" cap="none" normalizeH="0" baseline="0" dirty="0" smtClean="0">
-                <a:ln>
-                  <a:noFill/>
-                </a:ln>
-                <a:solidFill>
-                  <a:schemeClr val="tx1"/>
-                </a:solidFill>
-                <a:effectLst/>
-                <a:latin typeface="Franklin Gothic Demi" pitchFamily="34" charset="0"/>
-                <a:cs typeface="Times New Roman" pitchFamily="18" charset="0"/>
-              </a:rPr>
-              <a:t> moa </a:t>
-            </a:r>
-            <a:r>
-              <a:rPr kumimoji="0" lang="en-GB" sz="4800" b="0" i="0" u="none" strike="noStrike" cap="none" normalizeH="0" baseline="0" dirty="0" err="1" smtClean="0">
-                <a:ln>
-                  <a:noFill/>
-                </a:ln>
-                <a:solidFill>
-                  <a:schemeClr val="tx1"/>
-                </a:solidFill>
-                <a:effectLst/>
-                <a:latin typeface="Franklin Gothic Demi" pitchFamily="34" charset="0"/>
-                <a:cs typeface="Times New Roman" pitchFamily="18" charset="0"/>
-              </a:rPr>
-              <a:t>ianao</a:t>
-            </a:r>
-            <a:r>
-              <a:rPr kumimoji="0" lang="en-GB" sz="4800" b="0" i="0" u="none" strike="noStrike" cap="none" normalizeH="0" baseline="0" dirty="0" smtClean="0">
-                <a:ln>
-                  <a:noFill/>
-                </a:ln>
-                <a:solidFill>
-                  <a:schemeClr val="tx1"/>
-                </a:solidFill>
-                <a:effectLst/>
-                <a:latin typeface="Franklin Gothic Demi" pitchFamily="34" charset="0"/>
-                <a:cs typeface="Times New Roman" pitchFamily="18" charset="0"/>
-              </a:rPr>
-              <a:t> ?”</a:t>
-            </a:r>
-            <a:endParaRPr kumimoji="0" lang="en-GB" sz="4800" b="0" i="0" u="none" strike="noStrike" cap="none" normalizeH="0" baseline="0" dirty="0" smtClean="0">
-              <a:ln>
-                <a:noFill/>
-              </a:ln>
-              <a:solidFill>
-                <a:schemeClr val="tx1"/>
-              </a:solidFill>
-              <a:effectLst/>
-              <a:latin typeface="Franklin Gothic Demi" pitchFamily="34" charset="0"/>
-            </a:endParaRPr>
+              <a:t>“Aiza moa ianao ?”</a:t>
+            </a:r>
           </a:p>
         </p:txBody>
       </p:sp>
     </p:spTree>
-    <p:extLst>
-      <p:ext uri="{BB962C8B-B14F-4D97-AF65-F5344CB8AC3E}">
-        <p14:creationId xmlns:p14="http://schemas.microsoft.com/office/powerpoint/2010/main" val="3847125583"/>
-      </p:ext>
-    </p:extLst>
   </p:cSld>
   <p:clrMapOvr>
     <a:masterClrMapping/>
@@ -3831,7 +3215,7 @@
 </file>
 
 <file path=ppt/slides/slide2.xml><?xml version="1.0" encoding="utf-8"?>
-<p:sld xmlns:a="http://schemas.openxmlformats.org/drawingml/2006/main" xmlns:r="http://schemas.openxmlformats.org/officeDocument/2006/relationships" xmlns:p="http://schemas.openxmlformats.org/presentationml/2006/main">
+<p:sld xmlns:p="http://schemas.openxmlformats.org/presentationml/2006/main" xmlns:a="http://schemas.openxmlformats.org/drawingml/2006/main">
   <p:cSld>
     <p:spTree>
       <p:nvGrpSpPr>
@@ -3849,397 +3233,173 @@
       </p:grpSpPr>
       <p:sp>
         <p:nvSpPr>
-          <p:cNvPr id="4" name="Rectangle 1"/>
-          <p:cNvSpPr>
-            <a:spLocks noChangeArrowheads="1"/>
-          </p:cNvSpPr>
+          <p:cNvPr name="TextBox 2" id="2"/>
+          <p:cNvSpPr txBox="true"/>
           <p:nvPr/>
         </p:nvSpPr>
-        <p:spPr bwMode="auto">
+        <p:spPr>
           <a:xfrm>
-            <a:off x="-252536" y="701988"/>
-            <a:ext cx="9396536" cy="5262979"/>
+            <a:off x="635000" y="127000"/>
+            <a:ext cx="10922000" cy="508000"/>
           </a:xfrm>
           <a:prstGeom prst="rect">
             <a:avLst/>
           </a:prstGeom>
-          <a:noFill/>
-          <a:ln>
-            <a:noFill/>
-          </a:ln>
-          <a:effectLst/>
-          <a:extLst>
-            <a:ext uri="{909E8E84-426E-40DD-AFC4-6F175D3DCCD1}">
-              <a14:hiddenFill xmlns:a14="http://schemas.microsoft.com/office/drawing/2010/main">
-                <a:solidFill>
-                  <a:schemeClr val="accent1"/>
-                </a:solidFill>
-              </a14:hiddenFill>
-            </a:ext>
-            <a:ext uri="{91240B29-F687-4F45-9708-019B960494DF}">
-              <a14:hiddenLine xmlns:a14="http://schemas.microsoft.com/office/drawing/2010/main" w="9525">
-                <a:solidFill>
-                  <a:schemeClr val="tx1"/>
-                </a:solidFill>
-                <a:miter lim="800000"/>
-                <a:headEnd/>
-                <a:tailEnd/>
-              </a14:hiddenLine>
-            </a:ext>
-            <a:ext uri="{AF507438-7753-43E0-B8FC-AC1667EBCBE1}">
-              <a14:hiddenEffects xmlns:a14="http://schemas.microsoft.com/office/drawing/2010/main">
-                <a:effectLst>
-                  <a:outerShdw dist="35921" dir="2700000" algn="ctr" rotWithShape="0">
-                    <a:schemeClr val="bg2"/>
-                  </a:outerShdw>
-                </a:effectLst>
-              </a14:hiddenEffects>
-            </a:ext>
-          </a:extLst>
         </p:spPr>
         <p:txBody>
-          <a:bodyPr vert="horz" wrap="square" lIns="91440" tIns="45720" rIns="91440" bIns="45720" numCol="1" anchor="ctr" anchorCtr="0" compatLnSpc="1">
-            <a:prstTxWarp prst="textNoShape">
-              <a:avLst/>
-            </a:prstTxWarp>
-            <a:spAutoFit/>
-          </a:bodyPr>
-          <a:lstStyle/>
+          <a:bodyPr anchor="t" rtlCol="false"/>
+          <a:lstStyle/>
+          <a:p>
+            <a:pPr algn="l">
+              <a:defRPr/>
+            </a:pPr>
+            <a:r>
+              <a:rPr lang="fr-MG"/>
+              <a:t/>
+            </a:r>
+            <a:endParaRPr lang="en-US" sz="1100"/>
+          </a:p>
           <a:p>
             <a:pPr algn="ctr"/>
             <a:r>
-              <a:rPr lang="en-GB" sz="4800" dirty="0">
-                <a:latin typeface="Franklin Gothic Demi" pitchFamily="34" charset="0"/>
+              <a:rPr lang="en-US" sz="3200" b="true">
+                <a:solidFill>
+                  <a:srgbClr val="0000FF"/>
+                </a:solidFill>
+                <a:latin typeface="Verdana"/>
               </a:rPr>
-              <a:t>  ‘Ty </a:t>
-            </a:r>
-            <a:r>
-              <a:rPr lang="en-GB" sz="4800" dirty="0" err="1">
-                <a:latin typeface="Franklin Gothic Demi" pitchFamily="34" charset="0"/>
+              <a:t>HIRA 43</a:t>
+            </a:r>
+          </a:p>
+        </p:txBody>
+      </p:sp>
+      <p:sp>
+        <p:nvSpPr>
+          <p:cNvPr name="TextBox 3" id="3"/>
+          <p:cNvSpPr txBox="true"/>
+          <p:nvPr/>
+        </p:nvSpPr>
+        <p:spPr>
+          <a:xfrm>
+            <a:off x="635000" y="762000"/>
+            <a:ext cx="10922000" cy="5588000"/>
+          </a:xfrm>
+          <a:prstGeom prst="rect">
+            <a:avLst/>
+          </a:prstGeom>
+        </p:spPr>
+        <p:txBody>
+          <a:bodyPr anchor="t" rtlCol="false"/>
+          <a:lstStyle/>
+          <a:p>
+            <a:pPr algn="l">
+              <a:defRPr/>
+            </a:pPr>
+            <a:r>
+              <a:rPr lang="fr-MG"/>
+              <a:t/>
+            </a:r>
+            <a:endParaRPr lang="en-US" sz="1100"/>
+          </a:p>
+          <a:p>
+            <a:pPr algn="ctr"/>
+            <a:r>
+              <a:rPr lang="en-US" sz="4500" b="true">
+                <a:solidFill>
+                  <a:srgbClr val="000000"/>
+                </a:solidFill>
+                <a:latin typeface="Verdana"/>
               </a:rPr>
-              <a:t>aho</a:t>
-            </a:r>
-            <a:r>
-              <a:rPr lang="en-GB" sz="4800" dirty="0">
-                <a:latin typeface="Franklin Gothic Demi" pitchFamily="34" charset="0"/>
+              <a:t>‘Ty aho Jeso, ekeo</a:t>
+            </a:r>
+          </a:p>
+          <a:p>
+            <a:pPr algn="ctr"/>
+            <a:r>
+              <a:rPr lang="en-US" sz="4500" b="true">
+                <a:solidFill>
+                  <a:srgbClr val="000000"/>
+                </a:solidFill>
+                <a:latin typeface="Verdana"/>
               </a:rPr>
-              <a:t> </a:t>
-            </a:r>
-            <a:r>
-              <a:rPr lang="en-GB" sz="4800" dirty="0" err="1">
-                <a:latin typeface="Franklin Gothic Demi" pitchFamily="34" charset="0"/>
+              <a:t>(ekeo mba) ho irakao</a:t>
+            </a:r>
+          </a:p>
+          <a:p>
+            <a:pPr algn="ctr"/>
+            <a:r>
+              <a:rPr lang="en-US" sz="4500" b="true">
+                <a:solidFill>
+                  <a:srgbClr val="000000"/>
+                </a:solidFill>
+                <a:latin typeface="Verdana"/>
               </a:rPr>
-              <a:t>Jeso</a:t>
-            </a:r>
-            <a:r>
-              <a:rPr lang="en-GB" sz="4800" dirty="0">
-                <a:latin typeface="Franklin Gothic Demi" pitchFamily="34" charset="0"/>
-              </a:rPr>
-              <a:t>, </a:t>
-            </a:r>
-            <a:r>
-              <a:rPr lang="en-GB" sz="4800" dirty="0" err="1">
-                <a:latin typeface="Franklin Gothic Demi" pitchFamily="34" charset="0"/>
-              </a:rPr>
-              <a:t>ekeo</a:t>
-            </a:r>
-            <a:r>
-              <a:rPr lang="en-GB" sz="4800" dirty="0">
-                <a:latin typeface="Franklin Gothic Demi" pitchFamily="34" charset="0"/>
-              </a:rPr>
-              <a:t> </a:t>
-            </a:r>
-            <a:endParaRPr lang="en-GB" sz="4800" dirty="0" smtClean="0">
-              <a:latin typeface="Franklin Gothic Demi" pitchFamily="34" charset="0"/>
-            </a:endParaRPr>
+              <a:t>Raiso hanao ny sitrakao</a:t>
+            </a:r>
           </a:p>
           <a:p>
             <a:pPr algn="ctr"/>
             <a:r>
-              <a:rPr lang="en-GB" sz="4800" dirty="0">
-                <a:latin typeface="Franklin Gothic Demi" pitchFamily="34" charset="0"/>
-              </a:rPr>
-              <a:t>      (</a:t>
-            </a:r>
-            <a:r>
-              <a:rPr lang="en-GB" sz="4800" dirty="0" err="1">
-                <a:latin typeface="Franklin Gothic Demi" pitchFamily="34" charset="0"/>
-              </a:rPr>
-              <a:t>ekeo</a:t>
-            </a:r>
-            <a:r>
-              <a:rPr lang="en-GB" sz="4800" dirty="0">
-                <a:latin typeface="Franklin Gothic Demi" pitchFamily="34" charset="0"/>
-              </a:rPr>
-              <a:t> </a:t>
-            </a:r>
-            <a:r>
-              <a:rPr lang="en-GB" sz="4800" dirty="0" err="1">
-                <a:latin typeface="Franklin Gothic Demi" pitchFamily="34" charset="0"/>
-              </a:rPr>
-              <a:t>mba</a:t>
-            </a:r>
-            <a:r>
-              <a:rPr lang="en-GB" sz="4800" dirty="0">
-                <a:latin typeface="Franklin Gothic Demi" pitchFamily="34" charset="0"/>
-              </a:rPr>
-              <a:t>) </a:t>
-            </a:r>
-            <a:r>
-              <a:rPr lang="en-GB" sz="4800" dirty="0" err="1">
-                <a:latin typeface="Franklin Gothic Demi" pitchFamily="34" charset="0"/>
-              </a:rPr>
-              <a:t>ho</a:t>
-            </a:r>
-            <a:r>
-              <a:rPr lang="en-GB" sz="4800" dirty="0">
-                <a:latin typeface="Franklin Gothic Demi" pitchFamily="34" charset="0"/>
-              </a:rPr>
-              <a:t> </a:t>
-            </a:r>
-            <a:r>
-              <a:rPr lang="en-GB" sz="4800" dirty="0" err="1">
-                <a:latin typeface="Franklin Gothic Demi" pitchFamily="34" charset="0"/>
-              </a:rPr>
-              <a:t>irakao</a:t>
-            </a:r>
-            <a:endParaRPr lang="en-GB" sz="4800" dirty="0" smtClean="0">
-              <a:latin typeface="Franklin Gothic Demi" pitchFamily="34" charset="0"/>
-            </a:endParaRPr>
-          </a:p>
-          <a:p>
-            <a:pPr algn="ctr"/>
-            <a:r>
-              <a:rPr lang="en-GB" sz="4800" dirty="0">
-                <a:latin typeface="Franklin Gothic Demi" pitchFamily="34" charset="0"/>
-              </a:rPr>
-              <a:t>   </a:t>
-            </a:r>
-            <a:r>
-              <a:rPr lang="en-GB" sz="4800" dirty="0" err="1">
-                <a:latin typeface="Franklin Gothic Demi" pitchFamily="34" charset="0"/>
-              </a:rPr>
-              <a:t>Raiso</a:t>
-            </a:r>
-            <a:r>
-              <a:rPr lang="en-GB" sz="4800" dirty="0">
-                <a:latin typeface="Franklin Gothic Demi" pitchFamily="34" charset="0"/>
-              </a:rPr>
-              <a:t> </a:t>
-            </a:r>
-            <a:r>
-              <a:rPr lang="en-GB" sz="4800" dirty="0" err="1">
-                <a:latin typeface="Franklin Gothic Demi" pitchFamily="34" charset="0"/>
-              </a:rPr>
-              <a:t>hanao</a:t>
-            </a:r>
-            <a:r>
-              <a:rPr lang="en-GB" sz="4800" dirty="0">
-                <a:latin typeface="Franklin Gothic Demi" pitchFamily="34" charset="0"/>
-              </a:rPr>
-              <a:t> </a:t>
-            </a:r>
-            <a:r>
-              <a:rPr lang="en-GB" sz="4800" dirty="0" err="1">
-                <a:latin typeface="Franklin Gothic Demi" pitchFamily="34" charset="0"/>
-              </a:rPr>
-              <a:t>ny</a:t>
-            </a:r>
-            <a:r>
-              <a:rPr lang="en-GB" sz="4800" dirty="0">
-                <a:latin typeface="Franklin Gothic Demi" pitchFamily="34" charset="0"/>
-              </a:rPr>
-              <a:t> </a:t>
-            </a:r>
-            <a:r>
-              <a:rPr lang="en-GB" sz="4800" dirty="0" err="1" smtClean="0">
-                <a:latin typeface="Franklin Gothic Demi" pitchFamily="34" charset="0"/>
-              </a:rPr>
-              <a:t>sitrakao</a:t>
-            </a:r>
-            <a:r>
-              <a:rPr lang="en-GB" sz="4800" dirty="0">
-                <a:latin typeface="Franklin Gothic Demi" pitchFamily="34" charset="0"/>
-              </a:rPr>
-              <a:t>  </a:t>
-            </a:r>
-            <a:r>
-              <a:rPr lang="en-GB" sz="4800" dirty="0" err="1">
-                <a:latin typeface="Franklin Gothic Demi" pitchFamily="34" charset="0"/>
+              <a:rPr lang="en-US" sz="4500" b="true">
+                <a:solidFill>
+                  <a:srgbClr val="000000"/>
+                </a:solidFill>
+                <a:latin typeface="Verdana"/>
               </a:rPr>
               <a:t>tokoa</a:t>
             </a:r>
-            <a:endParaRPr lang="en-GB" sz="4800" dirty="0" smtClean="0">
-              <a:latin typeface="Franklin Gothic Demi" pitchFamily="34" charset="0"/>
-            </a:endParaRPr>
           </a:p>
           <a:p>
             <a:pPr algn="ctr"/>
             <a:r>
-              <a:rPr lang="en-GB" sz="4800" dirty="0">
-                <a:latin typeface="Franklin Gothic Demi" pitchFamily="34" charset="0"/>
+              <a:rPr lang="en-US" sz="4500" b="true">
+                <a:solidFill>
+                  <a:srgbClr val="000000"/>
+                </a:solidFill>
+                <a:latin typeface="Verdana"/>
               </a:rPr>
-              <a:t>      </a:t>
-            </a:r>
-            <a:r>
-              <a:rPr lang="en-GB" sz="4800" dirty="0" err="1">
-                <a:latin typeface="Franklin Gothic Demi" pitchFamily="34" charset="0"/>
+              <a:t>Jesosy ô ! (omeko)</a:t>
+            </a:r>
+          </a:p>
+          <a:p>
+            <a:pPr algn="ctr"/>
+            <a:r>
+              <a:rPr lang="en-US" sz="4500" b="true">
+                <a:solidFill>
+                  <a:srgbClr val="000000"/>
+                </a:solidFill>
+                <a:latin typeface="Verdana"/>
               </a:rPr>
-              <a:t>Jesosy</a:t>
-            </a:r>
-            <a:r>
-              <a:rPr lang="en-GB" sz="4800" dirty="0">
-                <a:latin typeface="Franklin Gothic Demi" pitchFamily="34" charset="0"/>
+              <a:t>mba ho Anao</a:t>
+            </a:r>
+          </a:p>
+          <a:p>
+            <a:pPr algn="ctr"/>
+            <a:r>
+              <a:rPr lang="en-US" sz="4500" b="true">
+                <a:solidFill>
+                  <a:srgbClr val="000000"/>
+                </a:solidFill>
+                <a:latin typeface="Verdana"/>
               </a:rPr>
-              <a:t> ô ! (</a:t>
-            </a:r>
-            <a:r>
-              <a:rPr lang="en-GB" sz="4800" dirty="0" err="1">
-                <a:latin typeface="Franklin Gothic Demi" pitchFamily="34" charset="0"/>
+              <a:t>Ny foko, tenako,</a:t>
+            </a:r>
+          </a:p>
+          <a:p>
+            <a:pPr algn="ctr"/>
+            <a:r>
+              <a:rPr lang="en-US" sz="4500" b="true">
+                <a:solidFill>
+                  <a:srgbClr val="000000"/>
+                </a:solidFill>
+                <a:latin typeface="Verdana"/>
               </a:rPr>
-              <a:t>omeko</a:t>
-            </a:r>
-            <a:r>
-              <a:rPr lang="en-GB" sz="4800" dirty="0">
-                <a:latin typeface="Franklin Gothic Demi" pitchFamily="34" charset="0"/>
-              </a:rPr>
-              <a:t>)</a:t>
-            </a:r>
-            <a:endParaRPr lang="en-GB" sz="4800" dirty="0" smtClean="0">
-              <a:latin typeface="Franklin Gothic Demi" pitchFamily="34" charset="0"/>
-            </a:endParaRPr>
-          </a:p>
-          <a:p>
-            <a:pPr algn="ctr"/>
-            <a:r>
-              <a:rPr lang="en-GB" sz="4800" dirty="0">
-                <a:latin typeface="Franklin Gothic Demi" pitchFamily="34" charset="0"/>
-              </a:rPr>
-              <a:t>            </a:t>
-            </a:r>
-            <a:r>
-              <a:rPr lang="en-GB" sz="4800" dirty="0" err="1">
-                <a:latin typeface="Franklin Gothic Demi" pitchFamily="34" charset="0"/>
-              </a:rPr>
-              <a:t>mba</a:t>
-            </a:r>
-            <a:r>
-              <a:rPr lang="en-GB" sz="4800" dirty="0">
-                <a:latin typeface="Franklin Gothic Demi" pitchFamily="34" charset="0"/>
-              </a:rPr>
-              <a:t> </a:t>
-            </a:r>
-            <a:r>
-              <a:rPr lang="en-GB" sz="4800" dirty="0" err="1">
-                <a:latin typeface="Franklin Gothic Demi" pitchFamily="34" charset="0"/>
-              </a:rPr>
-              <a:t>ho</a:t>
-            </a:r>
-            <a:r>
-              <a:rPr lang="en-GB" sz="4800" dirty="0">
-                <a:latin typeface="Franklin Gothic Demi" pitchFamily="34" charset="0"/>
-              </a:rPr>
-              <a:t> </a:t>
-            </a:r>
-            <a:r>
-              <a:rPr lang="en-GB" sz="4800" dirty="0" err="1">
-                <a:latin typeface="Franklin Gothic Demi" pitchFamily="34" charset="0"/>
-              </a:rPr>
-              <a:t>Anao</a:t>
-            </a:r>
-            <a:endParaRPr lang="en-GB" sz="4800" dirty="0" smtClean="0">
-              <a:latin typeface="Franklin Gothic Demi" pitchFamily="34" charset="0"/>
-            </a:endParaRPr>
-          </a:p>
-          <a:p>
-            <a:pPr algn="ctr"/>
-            <a:r>
-              <a:rPr lang="en-GB" sz="4800" dirty="0">
-                <a:latin typeface="Franklin Gothic Demi" pitchFamily="34" charset="0"/>
-              </a:rPr>
-              <a:t>      </a:t>
-            </a:r>
-            <a:r>
-              <a:rPr lang="en-GB" sz="4800" dirty="0" err="1">
-                <a:latin typeface="Franklin Gothic Demi" pitchFamily="34" charset="0"/>
-              </a:rPr>
-              <a:t>Ny</a:t>
-            </a:r>
-            <a:r>
-              <a:rPr lang="en-GB" sz="4800" dirty="0">
-                <a:latin typeface="Franklin Gothic Demi" pitchFamily="34" charset="0"/>
-              </a:rPr>
-              <a:t> </a:t>
-            </a:r>
-            <a:r>
-              <a:rPr lang="en-GB" sz="4800" dirty="0" err="1">
-                <a:latin typeface="Franklin Gothic Demi" pitchFamily="34" charset="0"/>
-              </a:rPr>
-              <a:t>foko</a:t>
-            </a:r>
-            <a:r>
-              <a:rPr lang="en-GB" sz="4800" dirty="0">
-                <a:latin typeface="Franklin Gothic Demi" pitchFamily="34" charset="0"/>
-              </a:rPr>
-              <a:t>, </a:t>
-            </a:r>
-            <a:r>
-              <a:rPr lang="en-GB" sz="4800" dirty="0" err="1">
-                <a:latin typeface="Franklin Gothic Demi" pitchFamily="34" charset="0"/>
-              </a:rPr>
-              <a:t>tenako</a:t>
-            </a:r>
-            <a:r>
-              <a:rPr lang="en-GB" sz="4800" dirty="0">
-                <a:latin typeface="Franklin Gothic Demi" pitchFamily="34" charset="0"/>
-              </a:rPr>
-              <a:t>,</a:t>
-            </a:r>
-            <a:endParaRPr lang="en-GB" sz="4800" dirty="0" smtClean="0">
-              <a:latin typeface="Franklin Gothic Demi" pitchFamily="34" charset="0"/>
-            </a:endParaRPr>
-          </a:p>
-          <a:p>
-            <a:pPr algn="ctr"/>
-            <a:r>
-              <a:rPr lang="en-GB" sz="4800" dirty="0">
-                <a:latin typeface="Franklin Gothic Demi" pitchFamily="34" charset="0"/>
-              </a:rPr>
-              <a:t>            </a:t>
-            </a:r>
-            <a:r>
-              <a:rPr lang="en-GB" sz="4800" dirty="0" err="1">
-                <a:latin typeface="Franklin Gothic Demi" pitchFamily="34" charset="0"/>
-              </a:rPr>
-              <a:t>ny</a:t>
-            </a:r>
-            <a:r>
-              <a:rPr lang="en-GB" sz="4800" dirty="0">
-                <a:latin typeface="Franklin Gothic Demi" pitchFamily="34" charset="0"/>
-              </a:rPr>
-              <a:t> </a:t>
-            </a:r>
-            <a:r>
-              <a:rPr lang="en-GB" sz="4800" dirty="0" err="1">
-                <a:latin typeface="Franklin Gothic Demi" pitchFamily="34" charset="0"/>
-              </a:rPr>
-              <a:t>fanahiko</a:t>
-            </a:r>
-            <a:r>
-              <a:rPr lang="en-GB" sz="4800" dirty="0">
-                <a:latin typeface="Franklin Gothic Demi" pitchFamily="34" charset="0"/>
-              </a:rPr>
-              <a:t>.</a:t>
+              <a:t>ny fanahiko.</a:t>
             </a:r>
           </a:p>
         </p:txBody>
       </p:sp>
     </p:spTree>
-    <p:extLst>
-      <p:ext uri="{BB962C8B-B14F-4D97-AF65-F5344CB8AC3E}">
-        <p14:creationId xmlns:p14="http://schemas.microsoft.com/office/powerpoint/2010/main" val="2945557329"/>
-      </p:ext>
-    </p:extLst>
   </p:cSld>
   <p:clrMapOvr>
     <a:masterClrMapping/>
@@ -4248,7 +3408,7 @@
 </file>
 
 <file path=ppt/slides/slide3.xml><?xml version="1.0" encoding="utf-8"?>
-<p:sld xmlns:a="http://schemas.openxmlformats.org/drawingml/2006/main" xmlns:r="http://schemas.openxmlformats.org/officeDocument/2006/relationships" xmlns:p="http://schemas.openxmlformats.org/presentationml/2006/main">
+<p:sld xmlns:p="http://schemas.openxmlformats.org/presentationml/2006/main" xmlns:a="http://schemas.openxmlformats.org/drawingml/2006/main">
   <p:cSld>
     <p:spTree>
       <p:nvGrpSpPr>
@@ -4266,349 +3426,161 @@
       </p:grpSpPr>
       <p:sp>
         <p:nvSpPr>
-          <p:cNvPr id="4" name="Rectangle 1"/>
-          <p:cNvSpPr>
-            <a:spLocks noChangeArrowheads="1"/>
-          </p:cNvSpPr>
+          <p:cNvPr name="TextBox 2" id="2"/>
+          <p:cNvSpPr txBox="true"/>
           <p:nvPr/>
         </p:nvSpPr>
-        <p:spPr bwMode="auto">
+        <p:spPr>
           <a:xfrm>
-            <a:off x="-252536" y="701991"/>
-            <a:ext cx="9396536" cy="5262979"/>
+            <a:off x="635000" y="127000"/>
+            <a:ext cx="10922000" cy="508000"/>
           </a:xfrm>
           <a:prstGeom prst="rect">
             <a:avLst/>
           </a:prstGeom>
-          <a:noFill/>
-          <a:ln>
-            <a:noFill/>
-          </a:ln>
-          <a:effectLst/>
-          <a:extLst>
-            <a:ext uri="{909E8E84-426E-40DD-AFC4-6F175D3DCCD1}">
-              <a14:hiddenFill xmlns:a14="http://schemas.microsoft.com/office/drawing/2010/main">
-                <a:solidFill>
-                  <a:schemeClr val="accent1"/>
-                </a:solidFill>
-              </a14:hiddenFill>
-            </a:ext>
-            <a:ext uri="{91240B29-F687-4F45-9708-019B960494DF}">
-              <a14:hiddenLine xmlns:a14="http://schemas.microsoft.com/office/drawing/2010/main" w="9525">
-                <a:solidFill>
-                  <a:schemeClr val="tx1"/>
-                </a:solidFill>
-                <a:miter lim="800000"/>
-                <a:headEnd/>
-                <a:tailEnd/>
-              </a14:hiddenLine>
-            </a:ext>
-            <a:ext uri="{AF507438-7753-43E0-B8FC-AC1667EBCBE1}">
-              <a14:hiddenEffects xmlns:a14="http://schemas.microsoft.com/office/drawing/2010/main">
-                <a:effectLst>
-                  <a:outerShdw dist="35921" dir="2700000" algn="ctr" rotWithShape="0">
-                    <a:schemeClr val="bg2"/>
-                  </a:outerShdw>
-                </a:effectLst>
-              </a14:hiddenEffects>
-            </a:ext>
-          </a:extLst>
         </p:spPr>
         <p:txBody>
-          <a:bodyPr vert="horz" wrap="square" lIns="91440" tIns="45720" rIns="91440" bIns="45720" numCol="1" anchor="ctr" anchorCtr="0" compatLnSpc="1">
-            <a:prstTxWarp prst="textNoShape">
-              <a:avLst/>
-            </a:prstTxWarp>
-            <a:spAutoFit/>
-          </a:bodyPr>
-          <a:lstStyle/>
+          <a:bodyPr anchor="t" rtlCol="false"/>
+          <a:lstStyle/>
+          <a:p>
+            <a:pPr algn="l">
+              <a:defRPr/>
+            </a:pPr>
+            <a:r>
+              <a:rPr lang="fr-MG"/>
+              <a:t/>
+            </a:r>
+            <a:endParaRPr lang="en-US" sz="1100"/>
+          </a:p>
           <a:p>
             <a:pPr algn="ctr"/>
             <a:r>
-              <a:rPr lang="en-GB" sz="4800" dirty="0">
-                <a:latin typeface="Franklin Gothic Demi" pitchFamily="34" charset="0"/>
+              <a:rPr lang="en-US" sz="3200" b="true">
+                <a:solidFill>
+                  <a:srgbClr val="0000FF"/>
+                </a:solidFill>
+                <a:latin typeface="Verdana"/>
               </a:rPr>
-              <a:t>E ! </a:t>
-            </a:r>
-            <a:r>
-              <a:rPr lang="en-GB" sz="4800" dirty="0" err="1">
-                <a:latin typeface="Franklin Gothic Demi" pitchFamily="34" charset="0"/>
+              <a:t>HIRA 43</a:t>
+            </a:r>
+          </a:p>
+        </p:txBody>
+      </p:sp>
+      <p:sp>
+        <p:nvSpPr>
+          <p:cNvPr name="TextBox 3" id="3"/>
+          <p:cNvSpPr txBox="true"/>
+          <p:nvPr/>
+        </p:nvSpPr>
+        <p:spPr>
+          <a:xfrm>
+            <a:off x="635000" y="762000"/>
+            <a:ext cx="10922000" cy="5588000"/>
+          </a:xfrm>
+          <a:prstGeom prst="rect">
+            <a:avLst/>
+          </a:prstGeom>
+        </p:spPr>
+        <p:txBody>
+          <a:bodyPr anchor="t" rtlCol="false"/>
+          <a:lstStyle/>
+          <a:p>
+            <a:pPr algn="l">
+              <a:defRPr/>
+            </a:pPr>
+            <a:r>
+              <a:rPr lang="fr-MG"/>
+              <a:t/>
+            </a:r>
+            <a:endParaRPr lang="en-US" sz="1100"/>
+          </a:p>
+          <a:p>
+            <a:pPr algn="ctr"/>
+            <a:r>
+              <a:rPr lang="en-US" sz="4500" b="true">
+                <a:solidFill>
+                  <a:srgbClr val="000000"/>
+                </a:solidFill>
+                <a:latin typeface="Verdana"/>
               </a:rPr>
-              <a:t>lalan-tsarotra</a:t>
-            </a:r>
-            <a:r>
-              <a:rPr lang="en-GB" sz="4800" dirty="0">
-                <a:latin typeface="Franklin Gothic Demi" pitchFamily="34" charset="0"/>
+              <a:t>E ! lalan-tsarotra ilàna anao</a:t>
+            </a:r>
+          </a:p>
+          <a:p>
+            <a:pPr algn="ctr"/>
+            <a:r>
+              <a:rPr lang="en-US" sz="4500" b="true">
+                <a:solidFill>
+                  <a:srgbClr val="000000"/>
+                </a:solidFill>
+                <a:latin typeface="Verdana"/>
               </a:rPr>
-              <a:t> </a:t>
-            </a:r>
-            <a:r>
-              <a:rPr lang="en-GB" sz="4800" dirty="0" err="1">
-                <a:latin typeface="Franklin Gothic Demi" pitchFamily="34" charset="0"/>
+              <a:t>Ady mafy no ao,</a:t>
+            </a:r>
+          </a:p>
+          <a:p>
+            <a:pPr algn="ctr"/>
+            <a:r>
+              <a:rPr lang="en-US" sz="4500" b="true">
+                <a:solidFill>
+                  <a:srgbClr val="000000"/>
+                </a:solidFill>
+                <a:latin typeface="Verdana"/>
               </a:rPr>
-              <a:t>ilàna</a:t>
-            </a:r>
-            <a:r>
-              <a:rPr lang="en-GB" sz="4800" dirty="0">
-                <a:latin typeface="Franklin Gothic Demi" pitchFamily="34" charset="0"/>
-              </a:rPr>
-              <a:t> </a:t>
-            </a:r>
-            <a:r>
-              <a:rPr lang="en-GB" sz="4800" dirty="0" err="1">
-                <a:latin typeface="Franklin Gothic Demi" pitchFamily="34" charset="0"/>
-              </a:rPr>
-              <a:t>anao</a:t>
-            </a:r>
-            <a:endParaRPr lang="en-GB" sz="4800" dirty="0" smtClean="0">
-              <a:latin typeface="Franklin Gothic Demi" pitchFamily="34" charset="0"/>
-            </a:endParaRPr>
+              <a:t>“Aiza moa ianao ?”</a:t>
+            </a:r>
           </a:p>
           <a:p>
             <a:pPr algn="ctr"/>
             <a:r>
-              <a:rPr lang="en-GB" sz="4800" dirty="0">
-                <a:latin typeface="Franklin Gothic Demi" pitchFamily="34" charset="0"/>
-              </a:rPr>
-              <a:t>   </a:t>
-            </a:r>
-            <a:r>
-              <a:rPr lang="en-GB" sz="4800" dirty="0" err="1">
-                <a:latin typeface="Franklin Gothic Demi" pitchFamily="34" charset="0"/>
-              </a:rPr>
-              <a:t>Ady</a:t>
-            </a:r>
-            <a:r>
-              <a:rPr lang="en-GB" sz="4800" dirty="0">
-                <a:latin typeface="Franklin Gothic Demi" pitchFamily="34" charset="0"/>
-              </a:rPr>
-              <a:t> </a:t>
-            </a:r>
-            <a:r>
-              <a:rPr lang="en-GB" sz="4800" dirty="0" err="1">
-                <a:latin typeface="Franklin Gothic Demi" pitchFamily="34" charset="0"/>
-              </a:rPr>
-              <a:t>mafy</a:t>
-            </a:r>
-            <a:r>
-              <a:rPr lang="en-GB" sz="4800" dirty="0">
-                <a:latin typeface="Franklin Gothic Demi" pitchFamily="34" charset="0"/>
-              </a:rPr>
-              <a:t> no </a:t>
-            </a:r>
-            <a:r>
-              <a:rPr lang="en-GB" sz="4800" dirty="0" err="1">
-                <a:latin typeface="Franklin Gothic Demi" pitchFamily="34" charset="0"/>
-              </a:rPr>
-              <a:t>ao</a:t>
-            </a:r>
-            <a:r>
-              <a:rPr lang="en-GB" sz="4800" dirty="0">
-                <a:latin typeface="Franklin Gothic Demi" pitchFamily="34" charset="0"/>
-              </a:rPr>
-              <a:t>,</a:t>
-            </a:r>
-            <a:endParaRPr lang="en-GB" sz="4800" dirty="0" smtClean="0">
-              <a:latin typeface="Franklin Gothic Demi" pitchFamily="34" charset="0"/>
-            </a:endParaRPr>
-          </a:p>
-          <a:p>
-            <a:pPr algn="ctr"/>
-            <a:r>
-              <a:rPr lang="en-GB" sz="4800" dirty="0">
-                <a:latin typeface="Franklin Gothic Demi" pitchFamily="34" charset="0"/>
-              </a:rPr>
-              <a:t>       “</a:t>
-            </a:r>
-            <a:r>
-              <a:rPr lang="en-GB" sz="4800" dirty="0" err="1">
-                <a:latin typeface="Franklin Gothic Demi" pitchFamily="34" charset="0"/>
-              </a:rPr>
-              <a:t>Aiza</a:t>
-            </a:r>
-            <a:r>
-              <a:rPr lang="en-GB" sz="4800" dirty="0">
-                <a:latin typeface="Franklin Gothic Demi" pitchFamily="34" charset="0"/>
-              </a:rPr>
-              <a:t> moa </a:t>
-            </a:r>
-            <a:r>
-              <a:rPr lang="en-GB" sz="4800" dirty="0" err="1">
-                <a:latin typeface="Franklin Gothic Demi" pitchFamily="34" charset="0"/>
-              </a:rPr>
-              <a:t>ianao</a:t>
-            </a:r>
-            <a:r>
-              <a:rPr lang="en-GB" sz="4800" dirty="0">
-                <a:latin typeface="Franklin Gothic Demi" pitchFamily="34" charset="0"/>
-              </a:rPr>
-              <a:t> ?”</a:t>
-            </a:r>
-            <a:endParaRPr lang="en-GB" sz="4800" dirty="0" smtClean="0">
-              <a:latin typeface="Franklin Gothic Demi" pitchFamily="34" charset="0"/>
-            </a:endParaRPr>
-          </a:p>
-          <a:p>
-            <a:pPr algn="ctr"/>
-            <a:r>
-              <a:rPr lang="en-GB" sz="4800" dirty="0">
-                <a:latin typeface="Franklin Gothic Demi" pitchFamily="34" charset="0"/>
-              </a:rPr>
-              <a:t>   </a:t>
-            </a:r>
-            <a:r>
-              <a:rPr lang="en-GB" sz="4800" dirty="0" err="1">
-                <a:latin typeface="Franklin Gothic Demi" pitchFamily="34" charset="0"/>
+              <a:rPr lang="en-US" sz="4500" b="true">
+                <a:solidFill>
+                  <a:srgbClr val="000000"/>
+                </a:solidFill>
+                <a:latin typeface="Verdana"/>
               </a:rPr>
               <a:t>Reseonao</a:t>
             </a:r>
-            <a:endParaRPr lang="en-GB" sz="4800" dirty="0" smtClean="0">
-              <a:latin typeface="Franklin Gothic Demi" pitchFamily="34" charset="0"/>
-            </a:endParaRPr>
           </a:p>
           <a:p>
             <a:pPr algn="ctr"/>
             <a:r>
-              <a:rPr lang="en-GB" sz="4800" dirty="0">
-                <a:latin typeface="Franklin Gothic Demi" pitchFamily="34" charset="0"/>
+              <a:rPr lang="en-US" sz="4500" b="true">
+                <a:solidFill>
+                  <a:srgbClr val="000000"/>
+                </a:solidFill>
+                <a:latin typeface="Verdana"/>
               </a:rPr>
-              <a:t>       ‘</a:t>
-            </a:r>
-            <a:r>
-              <a:rPr lang="en-GB" sz="4800" dirty="0" err="1">
-                <a:latin typeface="Franklin Gothic Demi" pitchFamily="34" charset="0"/>
+              <a:t>‘zao tontolo izao</a:t>
+            </a:r>
+          </a:p>
+          <a:p>
+            <a:pPr algn="ctr"/>
+            <a:r>
+              <a:rPr lang="en-US" sz="4500" b="true">
+                <a:solidFill>
+                  <a:srgbClr val="000000"/>
+                </a:solidFill>
+                <a:latin typeface="Verdana"/>
               </a:rPr>
-              <a:t>zao</a:t>
-            </a:r>
-            <a:r>
-              <a:rPr lang="en-GB" sz="4800" dirty="0">
-                <a:latin typeface="Franklin Gothic Demi" pitchFamily="34" charset="0"/>
+              <a:t>Mba ho ahy re izao,</a:t>
+            </a:r>
+          </a:p>
+          <a:p>
+            <a:pPr algn="ctr"/>
+            <a:r>
+              <a:rPr lang="en-US" sz="4500" b="true">
+                <a:solidFill>
+                  <a:srgbClr val="000000"/>
+                </a:solidFill>
+                <a:latin typeface="Verdana"/>
               </a:rPr>
-              <a:t> </a:t>
-            </a:r>
-            <a:r>
-              <a:rPr lang="en-GB" sz="4800" dirty="0" err="1">
-                <a:latin typeface="Franklin Gothic Demi" pitchFamily="34" charset="0"/>
-              </a:rPr>
-              <a:t>tontolo</a:t>
-            </a:r>
-            <a:r>
-              <a:rPr lang="en-GB" sz="4800" dirty="0">
-                <a:latin typeface="Franklin Gothic Demi" pitchFamily="34" charset="0"/>
-              </a:rPr>
-              <a:t> </a:t>
-            </a:r>
-            <a:r>
-              <a:rPr lang="en-GB" sz="4800" dirty="0" err="1">
-                <a:latin typeface="Franklin Gothic Demi" pitchFamily="34" charset="0"/>
-              </a:rPr>
-              <a:t>izao</a:t>
-            </a:r>
-            <a:endParaRPr lang="en-GB" sz="4800" dirty="0" smtClean="0">
-              <a:latin typeface="Franklin Gothic Demi" pitchFamily="34" charset="0"/>
-            </a:endParaRPr>
-          </a:p>
-          <a:p>
-            <a:pPr algn="ctr"/>
-            <a:r>
-              <a:rPr lang="en-GB" sz="4800" dirty="0">
-                <a:latin typeface="Franklin Gothic Demi" pitchFamily="34" charset="0"/>
-              </a:rPr>
-              <a:t>   </a:t>
-            </a:r>
-            <a:r>
-              <a:rPr lang="en-GB" sz="4800" dirty="0" err="1">
-                <a:latin typeface="Franklin Gothic Demi" pitchFamily="34" charset="0"/>
-              </a:rPr>
-              <a:t>Mba</a:t>
-            </a:r>
-            <a:r>
-              <a:rPr lang="en-GB" sz="4800" dirty="0">
-                <a:latin typeface="Franklin Gothic Demi" pitchFamily="34" charset="0"/>
-              </a:rPr>
-              <a:t> </a:t>
-            </a:r>
-            <a:r>
-              <a:rPr lang="en-GB" sz="4800" dirty="0" err="1">
-                <a:latin typeface="Franklin Gothic Demi" pitchFamily="34" charset="0"/>
-              </a:rPr>
-              <a:t>ho</a:t>
-            </a:r>
-            <a:r>
-              <a:rPr lang="en-GB" sz="4800" dirty="0">
-                <a:latin typeface="Franklin Gothic Demi" pitchFamily="34" charset="0"/>
-              </a:rPr>
-              <a:t> </a:t>
-            </a:r>
-            <a:r>
-              <a:rPr lang="en-GB" sz="4800" dirty="0" err="1">
-                <a:latin typeface="Franklin Gothic Demi" pitchFamily="34" charset="0"/>
-              </a:rPr>
-              <a:t>ahy</a:t>
-            </a:r>
-            <a:r>
-              <a:rPr lang="en-GB" sz="4800" dirty="0">
-                <a:latin typeface="Franklin Gothic Demi" pitchFamily="34" charset="0"/>
-              </a:rPr>
-              <a:t> re </a:t>
-            </a:r>
-            <a:r>
-              <a:rPr lang="en-GB" sz="4800" dirty="0" err="1">
-                <a:latin typeface="Franklin Gothic Demi" pitchFamily="34" charset="0"/>
-              </a:rPr>
-              <a:t>izao</a:t>
-            </a:r>
-            <a:r>
-              <a:rPr lang="en-GB" sz="4800" dirty="0">
-                <a:latin typeface="Franklin Gothic Demi" pitchFamily="34" charset="0"/>
-              </a:rPr>
-              <a:t>,</a:t>
-            </a:r>
-            <a:endParaRPr lang="en-GB" sz="4800" dirty="0" smtClean="0">
-              <a:latin typeface="Franklin Gothic Demi" pitchFamily="34" charset="0"/>
-            </a:endParaRPr>
-          </a:p>
-          <a:p>
-            <a:pPr algn="ctr"/>
-            <a:r>
-              <a:rPr lang="en-GB" sz="4800" dirty="0">
-                <a:latin typeface="Franklin Gothic Demi" pitchFamily="34" charset="0"/>
-              </a:rPr>
-              <a:t>       “</a:t>
-            </a:r>
-            <a:r>
-              <a:rPr lang="en-GB" sz="4800" dirty="0" err="1">
-                <a:latin typeface="Franklin Gothic Demi" pitchFamily="34" charset="0"/>
-              </a:rPr>
-              <a:t>Aiza</a:t>
-            </a:r>
-            <a:r>
-              <a:rPr lang="en-GB" sz="4800" dirty="0">
-                <a:latin typeface="Franklin Gothic Demi" pitchFamily="34" charset="0"/>
-              </a:rPr>
-              <a:t> moa </a:t>
-            </a:r>
-            <a:r>
-              <a:rPr lang="en-GB" sz="4800" dirty="0" err="1">
-                <a:latin typeface="Franklin Gothic Demi" pitchFamily="34" charset="0"/>
-              </a:rPr>
-              <a:t>ianao</a:t>
-            </a:r>
-            <a:r>
-              <a:rPr lang="en-GB" sz="4800" dirty="0">
-                <a:latin typeface="Franklin Gothic Demi" pitchFamily="34" charset="0"/>
-              </a:rPr>
-              <a:t> ?”</a:t>
+              <a:t>“Aiza moa ianao ?”</a:t>
             </a:r>
           </a:p>
         </p:txBody>
       </p:sp>
     </p:spTree>
-    <p:extLst>
-      <p:ext uri="{BB962C8B-B14F-4D97-AF65-F5344CB8AC3E}">
-        <p14:creationId xmlns:p14="http://schemas.microsoft.com/office/powerpoint/2010/main" val="1943550840"/>
-      </p:ext>
-    </p:extLst>
   </p:cSld>
   <p:clrMapOvr>
     <a:masterClrMapping/>
@@ -4617,7 +3589,7 @@
 </file>
 
 <file path=ppt/slides/slide4.xml><?xml version="1.0" encoding="utf-8"?>
-<p:sld xmlns:a="http://schemas.openxmlformats.org/drawingml/2006/main" xmlns:r="http://schemas.openxmlformats.org/officeDocument/2006/relationships" xmlns:p="http://schemas.openxmlformats.org/presentationml/2006/main">
+<p:sld xmlns:p="http://schemas.openxmlformats.org/presentationml/2006/main" xmlns:a="http://schemas.openxmlformats.org/drawingml/2006/main">
   <p:cSld>
     <p:spTree>
       <p:nvGrpSpPr>
@@ -4635,703 +3607,233 @@
       </p:grpSpPr>
       <p:sp>
         <p:nvSpPr>
-          <p:cNvPr id="4" name="Rectangle 1"/>
-          <p:cNvSpPr>
-            <a:spLocks noChangeArrowheads="1"/>
-          </p:cNvSpPr>
+          <p:cNvPr name="TextBox 2" id="2"/>
+          <p:cNvSpPr txBox="true"/>
           <p:nvPr/>
         </p:nvSpPr>
-        <p:spPr bwMode="auto">
+        <p:spPr>
           <a:xfrm>
-            <a:off x="-252536" y="701994"/>
-            <a:ext cx="9396536" cy="5262979"/>
+            <a:off x="635000" y="127000"/>
+            <a:ext cx="10922000" cy="508000"/>
           </a:xfrm>
           <a:prstGeom prst="rect">
             <a:avLst/>
           </a:prstGeom>
-          <a:noFill/>
-          <a:ln>
-            <a:noFill/>
-          </a:ln>
-          <a:effectLst/>
-          <a:extLst>
-            <a:ext uri="{909E8E84-426E-40DD-AFC4-6F175D3DCCD1}">
-              <a14:hiddenFill xmlns:a14="http://schemas.microsoft.com/office/drawing/2010/main">
-                <a:solidFill>
-                  <a:schemeClr val="accent1"/>
-                </a:solidFill>
-              </a14:hiddenFill>
-            </a:ext>
-            <a:ext uri="{91240B29-F687-4F45-9708-019B960494DF}">
-              <a14:hiddenLine xmlns:a14="http://schemas.microsoft.com/office/drawing/2010/main" w="9525">
-                <a:solidFill>
-                  <a:schemeClr val="tx1"/>
-                </a:solidFill>
-                <a:miter lim="800000"/>
-                <a:headEnd/>
-                <a:tailEnd/>
-              </a14:hiddenLine>
-            </a:ext>
-            <a:ext uri="{AF507438-7753-43E0-B8FC-AC1667EBCBE1}">
-              <a14:hiddenEffects xmlns:a14="http://schemas.microsoft.com/office/drawing/2010/main">
-                <a:effectLst>
-                  <a:outerShdw dist="35921" dir="2700000" algn="ctr" rotWithShape="0">
-                    <a:schemeClr val="bg2"/>
-                  </a:outerShdw>
-                </a:effectLst>
-              </a14:hiddenEffects>
-            </a:ext>
-          </a:extLst>
         </p:spPr>
         <p:txBody>
-          <a:bodyPr vert="horz" wrap="square" lIns="91440" tIns="45720" rIns="91440" bIns="45720" numCol="1" anchor="ctr" anchorCtr="0" compatLnSpc="1">
-            <a:prstTxWarp prst="textNoShape">
-              <a:avLst/>
-            </a:prstTxWarp>
-            <a:spAutoFit/>
-          </a:bodyPr>
-          <a:lstStyle/>
+          <a:bodyPr anchor="t" rtlCol="false"/>
+          <a:lstStyle/>
+          <a:p>
+            <a:pPr algn="l">
+              <a:defRPr/>
+            </a:pPr>
+            <a:r>
+              <a:rPr lang="fr-MG"/>
+              <a:t/>
+            </a:r>
+            <a:endParaRPr lang="en-US" sz="1100"/>
+          </a:p>
           <a:p>
             <a:pPr algn="ctr"/>
             <a:r>
-              <a:rPr lang="en-GB" sz="4800" dirty="0">
-                <a:latin typeface="Franklin Gothic Demi" pitchFamily="34" charset="0"/>
+              <a:rPr lang="en-US" sz="3200" b="true">
+                <a:solidFill>
+                  <a:srgbClr val="0000FF"/>
+                </a:solidFill>
+                <a:latin typeface="Verdana"/>
               </a:rPr>
-              <a:t>       </a:t>
-            </a:r>
-            <a:r>
-              <a:rPr lang="en-GB" sz="4800" dirty="0" err="1">
-                <a:latin typeface="Franklin Gothic Demi" pitchFamily="34" charset="0"/>
-              </a:rPr>
-              <a:t>Ny</a:t>
-            </a:r>
-            <a:r>
-              <a:rPr lang="en-GB" sz="4800" dirty="0">
-                <a:latin typeface="Franklin Gothic Demi" pitchFamily="34" charset="0"/>
-              </a:rPr>
-              <a:t> </a:t>
-            </a:r>
-            <a:r>
-              <a:rPr lang="en-GB" sz="4800" dirty="0" err="1">
-                <a:latin typeface="Franklin Gothic Demi" pitchFamily="34" charset="0"/>
-              </a:rPr>
-              <a:t>hery</a:t>
-            </a:r>
-            <a:r>
-              <a:rPr lang="en-GB" sz="4800" dirty="0">
-                <a:latin typeface="Franklin Gothic Demi" pitchFamily="34" charset="0"/>
-              </a:rPr>
-              <a:t>, </a:t>
-            </a:r>
-            <a:r>
-              <a:rPr lang="en-GB" sz="4800" dirty="0" err="1">
-                <a:latin typeface="Franklin Gothic Demi" pitchFamily="34" charset="0"/>
-              </a:rPr>
-              <a:t>aina</a:t>
-            </a:r>
-            <a:r>
-              <a:rPr lang="en-GB" sz="4800" dirty="0">
-                <a:latin typeface="Franklin Gothic Demi" pitchFamily="34" charset="0"/>
-              </a:rPr>
-              <a:t> </a:t>
-            </a:r>
-            <a:r>
-              <a:rPr lang="en-GB" sz="4800" dirty="0" err="1">
-                <a:latin typeface="Franklin Gothic Demi" pitchFamily="34" charset="0"/>
-              </a:rPr>
-              <a:t>sy</a:t>
-            </a:r>
-            <a:r>
-              <a:rPr lang="en-GB" sz="4800" dirty="0">
-                <a:latin typeface="Franklin Gothic Demi" pitchFamily="34" charset="0"/>
-              </a:rPr>
-              <a:t> </a:t>
-            </a:r>
-            <a:r>
-              <a:rPr lang="en-GB" sz="4800" dirty="0" err="1">
-                <a:latin typeface="Franklin Gothic Demi" pitchFamily="34" charset="0"/>
-              </a:rPr>
-              <a:t>fanananao</a:t>
-            </a:r>
-            <a:endParaRPr lang="en-GB" sz="4800" dirty="0" smtClean="0">
-              <a:latin typeface="Franklin Gothic Demi" pitchFamily="34" charset="0"/>
-            </a:endParaRPr>
-          </a:p>
-          <a:p>
-            <a:pPr algn="ctr"/>
-            <a:r>
-              <a:rPr lang="en-GB" sz="4800" dirty="0">
-                <a:latin typeface="Franklin Gothic Demi" pitchFamily="34" charset="0"/>
-              </a:rPr>
-              <a:t>       No </a:t>
-            </a:r>
-            <a:r>
-              <a:rPr lang="en-GB" sz="4800" dirty="0" err="1">
-                <a:latin typeface="Franklin Gothic Demi" pitchFamily="34" charset="0"/>
-              </a:rPr>
-              <a:t>ilaiko</a:t>
-            </a:r>
-            <a:r>
-              <a:rPr lang="en-GB" sz="4800" dirty="0">
-                <a:latin typeface="Franklin Gothic Demi" pitchFamily="34" charset="0"/>
-              </a:rPr>
-              <a:t> </a:t>
-            </a:r>
-            <a:r>
-              <a:rPr lang="en-GB" sz="4800" dirty="0" err="1">
-                <a:latin typeface="Franklin Gothic Demi" pitchFamily="34" charset="0"/>
-              </a:rPr>
-              <a:t>izao</a:t>
-            </a:r>
-            <a:endParaRPr lang="en-GB" sz="4800" dirty="0" smtClean="0">
-              <a:latin typeface="Franklin Gothic Demi" pitchFamily="34" charset="0"/>
-            </a:endParaRPr>
-          </a:p>
-          <a:p>
-            <a:pPr algn="ctr"/>
-            <a:r>
-              <a:rPr lang="en-GB" sz="4800" dirty="0">
-                <a:latin typeface="Franklin Gothic Demi" pitchFamily="34" charset="0"/>
-              </a:rPr>
-              <a:t>       ”</a:t>
-            </a:r>
-            <a:r>
-              <a:rPr lang="en-GB" sz="4800" dirty="0" err="1">
-                <a:latin typeface="Franklin Gothic Demi" pitchFamily="34" charset="0"/>
-              </a:rPr>
-              <a:t>Aiza</a:t>
-            </a:r>
-            <a:r>
-              <a:rPr lang="en-GB" sz="4800" dirty="0">
-                <a:latin typeface="Franklin Gothic Demi" pitchFamily="34" charset="0"/>
-              </a:rPr>
-              <a:t> moa </a:t>
-            </a:r>
-            <a:r>
-              <a:rPr lang="en-GB" sz="4800" dirty="0" err="1">
-                <a:latin typeface="Franklin Gothic Demi" pitchFamily="34" charset="0"/>
-              </a:rPr>
-              <a:t>ianao</a:t>
-            </a:r>
-            <a:r>
-              <a:rPr lang="en-GB" sz="4800" dirty="0">
-                <a:latin typeface="Franklin Gothic Demi" pitchFamily="34" charset="0"/>
-              </a:rPr>
-              <a:t> ?” </a:t>
-            </a:r>
-            <a:endParaRPr lang="en-GB" sz="4800" dirty="0" smtClean="0">
-              <a:latin typeface="Franklin Gothic Demi" pitchFamily="34" charset="0"/>
-            </a:endParaRPr>
-          </a:p>
-          <a:p>
-            <a:pPr algn="ctr"/>
-            <a:r>
-              <a:rPr lang="en-GB" sz="4800" dirty="0">
-                <a:latin typeface="Franklin Gothic Demi" pitchFamily="34" charset="0"/>
-              </a:rPr>
-              <a:t>       </a:t>
-            </a:r>
-            <a:r>
-              <a:rPr lang="en-GB" sz="4800" dirty="0" err="1">
-                <a:latin typeface="Franklin Gothic Demi" pitchFamily="34" charset="0"/>
-              </a:rPr>
-              <a:t>Ny</a:t>
-            </a:r>
-            <a:r>
-              <a:rPr lang="en-GB" sz="4800" dirty="0">
-                <a:latin typeface="Franklin Gothic Demi" pitchFamily="34" charset="0"/>
-              </a:rPr>
-              <a:t> </a:t>
-            </a:r>
-            <a:r>
-              <a:rPr lang="en-GB" sz="4800" dirty="0" err="1">
-                <a:latin typeface="Franklin Gothic Demi" pitchFamily="34" charset="0"/>
-              </a:rPr>
-              <a:t>teninao</a:t>
-            </a:r>
-            <a:r>
-              <a:rPr lang="en-GB" sz="4800" dirty="0">
-                <a:latin typeface="Franklin Gothic Demi" pitchFamily="34" charset="0"/>
-              </a:rPr>
-              <a:t> </a:t>
-            </a:r>
-            <a:r>
-              <a:rPr lang="en-GB" sz="4800" dirty="0" err="1">
-                <a:latin typeface="Franklin Gothic Demi" pitchFamily="34" charset="0"/>
-              </a:rPr>
-              <a:t>sy</a:t>
-            </a:r>
-            <a:r>
-              <a:rPr lang="en-GB" sz="4800" dirty="0">
-                <a:latin typeface="Franklin Gothic Demi" pitchFamily="34" charset="0"/>
-              </a:rPr>
-              <a:t> </a:t>
-            </a:r>
-            <a:r>
-              <a:rPr lang="en-GB" sz="4800" dirty="0" err="1">
-                <a:latin typeface="Franklin Gothic Demi" pitchFamily="34" charset="0"/>
-              </a:rPr>
-              <a:t>ny</a:t>
-            </a:r>
-            <a:r>
-              <a:rPr lang="en-GB" sz="4800" dirty="0">
-                <a:latin typeface="Franklin Gothic Demi" pitchFamily="34" charset="0"/>
-              </a:rPr>
-              <a:t> </a:t>
-            </a:r>
-            <a:r>
-              <a:rPr lang="en-GB" sz="4800" dirty="0" err="1">
-                <a:latin typeface="Franklin Gothic Demi" pitchFamily="34" charset="0"/>
-              </a:rPr>
-              <a:t>fanahinao</a:t>
-            </a:r>
-            <a:endParaRPr lang="en-GB" sz="4800" dirty="0" smtClean="0">
-              <a:latin typeface="Franklin Gothic Demi" pitchFamily="34" charset="0"/>
-            </a:endParaRPr>
-          </a:p>
-          <a:p>
-            <a:pPr algn="ctr"/>
-            <a:r>
-              <a:rPr lang="en-GB" sz="4800" dirty="0">
-                <a:latin typeface="Franklin Gothic Demi" pitchFamily="34" charset="0"/>
-              </a:rPr>
-              <a:t>       No </a:t>
-            </a:r>
-            <a:r>
-              <a:rPr lang="en-GB" sz="4800" dirty="0" err="1">
-                <a:latin typeface="Franklin Gothic Demi" pitchFamily="34" charset="0"/>
-              </a:rPr>
-              <a:t>takiako</a:t>
-            </a:r>
-            <a:r>
-              <a:rPr lang="en-GB" sz="4800" dirty="0">
-                <a:latin typeface="Franklin Gothic Demi" pitchFamily="34" charset="0"/>
-              </a:rPr>
-              <a:t> </a:t>
-            </a:r>
-            <a:r>
-              <a:rPr lang="en-GB" sz="4800" dirty="0" err="1">
-                <a:latin typeface="Franklin Gothic Demi" pitchFamily="34" charset="0"/>
-              </a:rPr>
-              <a:t>izao</a:t>
-            </a:r>
-            <a:endParaRPr lang="en-GB" sz="4800" dirty="0" smtClean="0">
-              <a:latin typeface="Franklin Gothic Demi" pitchFamily="34" charset="0"/>
-            </a:endParaRPr>
-          </a:p>
-          <a:p>
-            <a:pPr algn="ctr"/>
-            <a:r>
-              <a:rPr lang="en-GB" sz="4800" dirty="0">
-                <a:latin typeface="Franklin Gothic Demi" pitchFamily="34" charset="0"/>
-              </a:rPr>
-              <a:t>       “</a:t>
-            </a:r>
-            <a:r>
-              <a:rPr lang="en-GB" sz="4800" dirty="0" err="1">
-                <a:latin typeface="Franklin Gothic Demi" pitchFamily="34" charset="0"/>
-              </a:rPr>
-              <a:t>Aiza</a:t>
-            </a:r>
-            <a:r>
-              <a:rPr lang="en-GB" sz="4800" dirty="0">
-                <a:latin typeface="Franklin Gothic Demi" pitchFamily="34" charset="0"/>
-              </a:rPr>
-              <a:t> moa </a:t>
-            </a:r>
-            <a:r>
-              <a:rPr lang="en-GB" sz="4800" dirty="0" err="1">
-                <a:latin typeface="Franklin Gothic Demi" pitchFamily="34" charset="0"/>
-              </a:rPr>
-              <a:t>ianao</a:t>
-            </a:r>
-            <a:r>
-              <a:rPr lang="en-GB" sz="4800" dirty="0">
-                <a:latin typeface="Franklin Gothic Demi" pitchFamily="34" charset="0"/>
-              </a:rPr>
-              <a:t> ?”</a:t>
-            </a:r>
-            <a:endParaRPr lang="en-GB" sz="4800" dirty="0" smtClean="0">
-              <a:latin typeface="Franklin Gothic Demi" pitchFamily="34" charset="0"/>
-            </a:endParaRPr>
-          </a:p>
-          <a:p>
-            <a:pPr algn="ctr"/>
-            <a:r>
-              <a:rPr lang="en-GB" sz="4800" dirty="0">
-                <a:latin typeface="Franklin Gothic Demi" pitchFamily="34" charset="0"/>
-              </a:rPr>
-              <a:t>       </a:t>
-            </a:r>
-            <a:r>
-              <a:rPr lang="en-GB" sz="4800" dirty="0" err="1">
-                <a:latin typeface="Franklin Gothic Demi" pitchFamily="34" charset="0"/>
-              </a:rPr>
-              <a:t>Ny</a:t>
-            </a:r>
-            <a:r>
-              <a:rPr lang="en-GB" sz="4800" dirty="0">
-                <a:latin typeface="Franklin Gothic Demi" pitchFamily="34" charset="0"/>
-              </a:rPr>
-              <a:t> </a:t>
-            </a:r>
-            <a:r>
-              <a:rPr lang="en-GB" sz="4800" dirty="0" err="1">
-                <a:latin typeface="Franklin Gothic Demi" pitchFamily="34" charset="0"/>
-              </a:rPr>
-              <a:t>sandriko</a:t>
-            </a:r>
-            <a:r>
-              <a:rPr lang="en-GB" sz="4800" dirty="0">
-                <a:latin typeface="Franklin Gothic Demi" pitchFamily="34" charset="0"/>
-              </a:rPr>
-              <a:t> no </a:t>
-            </a:r>
-            <a:r>
-              <a:rPr lang="en-GB" sz="4800" dirty="0" err="1">
-                <a:latin typeface="Franklin Gothic Demi" pitchFamily="34" charset="0"/>
-              </a:rPr>
-              <a:t>hiaro</a:t>
-            </a:r>
-            <a:r>
-              <a:rPr lang="en-GB" sz="4800" dirty="0">
-                <a:latin typeface="Franklin Gothic Demi" pitchFamily="34" charset="0"/>
-              </a:rPr>
-              <a:t> </a:t>
-            </a:r>
-            <a:r>
-              <a:rPr lang="en-GB" sz="4800" dirty="0" err="1">
-                <a:latin typeface="Franklin Gothic Demi" pitchFamily="34" charset="0"/>
-              </a:rPr>
-              <a:t>anao</a:t>
-            </a:r>
-            <a:endParaRPr lang="en-GB" sz="4800" dirty="0">
-              <a:latin typeface="Franklin Gothic Demi" pitchFamily="34" charset="0"/>
-            </a:endParaRPr>
-          </a:p>
-        </p:txBody>
-      </p:sp>
-    </p:spTree>
-    <p:extLst>
-      <p:ext uri="{BB962C8B-B14F-4D97-AF65-F5344CB8AC3E}">
-        <p14:creationId xmlns:p14="http://schemas.microsoft.com/office/powerpoint/2010/main" val="3913162355"/>
-      </p:ext>
-    </p:extLst>
-  </p:cSld>
-  <p:clrMapOvr>
-    <a:masterClrMapping/>
-  </p:clrMapOvr>
-</p:sld>
-</file>
-
-<file path=ppt/slides/slide5.xml><?xml version="1.0" encoding="utf-8"?>
-<p:sld xmlns:a="http://schemas.openxmlformats.org/drawingml/2006/main" xmlns:r="http://schemas.openxmlformats.org/officeDocument/2006/relationships" xmlns:p="http://schemas.openxmlformats.org/presentationml/2006/main">
-  <p:cSld>
-    <p:spTree>
-      <p:nvGrpSpPr>
-        <p:cNvPr id="1" name=""/>
-        <p:cNvGrpSpPr/>
-        <p:nvPr/>
-      </p:nvGrpSpPr>
-      <p:grpSpPr>
-        <a:xfrm>
-          <a:off x="0" y="0"/>
-          <a:ext cx="0" cy="0"/>
-          <a:chOff x="0" y="0"/>
-          <a:chExt cx="0" cy="0"/>
-        </a:xfrm>
-      </p:grpSpPr>
-      <p:sp>
-        <p:nvSpPr>
-          <p:cNvPr id="4" name="Rectangle 1"/>
-          <p:cNvSpPr>
-            <a:spLocks noChangeArrowheads="1"/>
-          </p:cNvSpPr>
+              <a:t>HIRA 43</a:t>
+            </a:r>
+          </a:p>
+        </p:txBody>
+      </p:sp>
+      <p:sp>
+        <p:nvSpPr>
+          <p:cNvPr name="TextBox 3" id="3"/>
+          <p:cNvSpPr txBox="true"/>
           <p:nvPr/>
         </p:nvSpPr>
-        <p:spPr bwMode="auto">
+        <p:spPr>
           <a:xfrm>
-            <a:off x="-252536" y="1071329"/>
-            <a:ext cx="9396536" cy="4524315"/>
+            <a:off x="635000" y="762000"/>
+            <a:ext cx="10922000" cy="5588000"/>
           </a:xfrm>
           <a:prstGeom prst="rect">
             <a:avLst/>
           </a:prstGeom>
-          <a:noFill/>
-          <a:ln>
-            <a:noFill/>
-          </a:ln>
-          <a:effectLst/>
-          <a:extLst>
-            <a:ext uri="{909E8E84-426E-40DD-AFC4-6F175D3DCCD1}">
-              <a14:hiddenFill xmlns:a14="http://schemas.microsoft.com/office/drawing/2010/main">
-                <a:solidFill>
-                  <a:schemeClr val="accent1"/>
-                </a:solidFill>
-              </a14:hiddenFill>
-            </a:ext>
-            <a:ext uri="{91240B29-F687-4F45-9708-019B960494DF}">
-              <a14:hiddenLine xmlns:a14="http://schemas.microsoft.com/office/drawing/2010/main" w="9525">
-                <a:solidFill>
-                  <a:schemeClr val="tx1"/>
-                </a:solidFill>
-                <a:miter lim="800000"/>
-                <a:headEnd/>
-                <a:tailEnd/>
-              </a14:hiddenLine>
-            </a:ext>
-            <a:ext uri="{AF507438-7753-43E0-B8FC-AC1667EBCBE1}">
-              <a14:hiddenEffects xmlns:a14="http://schemas.microsoft.com/office/drawing/2010/main">
-                <a:effectLst>
-                  <a:outerShdw dist="35921" dir="2700000" algn="ctr" rotWithShape="0">
-                    <a:schemeClr val="bg2"/>
-                  </a:outerShdw>
-                </a:effectLst>
-              </a14:hiddenEffects>
-            </a:ext>
-          </a:extLst>
         </p:spPr>
         <p:txBody>
-          <a:bodyPr vert="horz" wrap="square" lIns="91440" tIns="45720" rIns="91440" bIns="45720" numCol="1" anchor="ctr" anchorCtr="0" compatLnSpc="1">
-            <a:prstTxWarp prst="textNoShape">
-              <a:avLst/>
-            </a:prstTxWarp>
-            <a:spAutoFit/>
-          </a:bodyPr>
-          <a:lstStyle/>
+          <a:bodyPr anchor="t" rtlCol="false"/>
+          <a:lstStyle/>
+          <a:p>
+            <a:pPr algn="l">
+              <a:defRPr/>
+            </a:pPr>
+            <a:r>
+              <a:rPr lang="fr-MG"/>
+              <a:t/>
+            </a:r>
+            <a:endParaRPr lang="en-US" sz="1100"/>
+          </a:p>
           <a:p>
             <a:pPr algn="ctr"/>
             <a:r>
-              <a:rPr lang="en-GB" sz="4800" dirty="0">
-                <a:latin typeface="Franklin Gothic Demi" pitchFamily="34" charset="0"/>
+              <a:rPr lang="en-US" sz="4500" b="true">
+                <a:solidFill>
+                  <a:srgbClr val="000000"/>
+                </a:solidFill>
+                <a:latin typeface="Verdana"/>
               </a:rPr>
-              <a:t>        </a:t>
-            </a:r>
-            <a:r>
-              <a:rPr lang="en-GB" sz="4800" dirty="0" err="1">
-                <a:latin typeface="Franklin Gothic Demi" pitchFamily="34" charset="0"/>
+              <a:t>Ny hery, aina sy fanananao</a:t>
+            </a:r>
+          </a:p>
+          <a:p>
+            <a:pPr algn="ctr"/>
+            <a:r>
+              <a:rPr lang="en-US" sz="4500" b="true">
+                <a:solidFill>
+                  <a:srgbClr val="000000"/>
+                </a:solidFill>
+                <a:latin typeface="Verdana"/>
               </a:rPr>
-              <a:t>Hisakambina</a:t>
-            </a:r>
-            <a:r>
-              <a:rPr lang="en-GB" sz="4800" dirty="0">
-                <a:latin typeface="Franklin Gothic Demi" pitchFamily="34" charset="0"/>
+              <a:t>No ilaiko izao</a:t>
+            </a:r>
+          </a:p>
+          <a:p>
+            <a:pPr algn="ctr"/>
+            <a:r>
+              <a:rPr lang="en-US" sz="4500" b="true">
+                <a:solidFill>
+                  <a:srgbClr val="000000"/>
+                </a:solidFill>
+                <a:latin typeface="Verdana"/>
               </a:rPr>
-              <a:t> </a:t>
-            </a:r>
-            <a:r>
-              <a:rPr lang="en-GB" sz="4800" dirty="0" err="1">
-                <a:latin typeface="Franklin Gothic Demi" pitchFamily="34" charset="0"/>
+              <a:t>”Aiza moa ianao ?”</a:t>
+            </a:r>
+          </a:p>
+          <a:p>
+            <a:pPr algn="ctr"/>
+            <a:r>
+              <a:rPr lang="en-US" sz="4500" b="true">
+                <a:solidFill>
+                  <a:srgbClr val="000000"/>
+                </a:solidFill>
+                <a:latin typeface="Verdana"/>
               </a:rPr>
-              <a:t>anao</a:t>
-            </a:r>
-            <a:endParaRPr lang="en-GB" sz="4800" dirty="0" smtClean="0">
-              <a:latin typeface="Franklin Gothic Demi" pitchFamily="34" charset="0"/>
-            </a:endParaRPr>
+              <a:t>Ny teninao sy ny fanahinao</a:t>
+            </a:r>
           </a:p>
           <a:p>
             <a:pPr algn="ctr"/>
             <a:r>
-              <a:rPr lang="en-GB" sz="4800" dirty="0">
-                <a:latin typeface="Franklin Gothic Demi" pitchFamily="34" charset="0"/>
+              <a:rPr lang="en-US" sz="4500" b="true">
+                <a:solidFill>
+                  <a:srgbClr val="000000"/>
+                </a:solidFill>
+                <a:latin typeface="Verdana"/>
               </a:rPr>
-              <a:t>           “</a:t>
-            </a:r>
-            <a:r>
-              <a:rPr lang="en-GB" sz="4800" dirty="0" err="1">
-                <a:latin typeface="Franklin Gothic Demi" pitchFamily="34" charset="0"/>
+              <a:t>No takiako izao</a:t>
+            </a:r>
+          </a:p>
+          <a:p>
+            <a:pPr algn="ctr"/>
+            <a:r>
+              <a:rPr lang="en-US" sz="4500" b="true">
+                <a:solidFill>
+                  <a:srgbClr val="000000"/>
+                </a:solidFill>
+                <a:latin typeface="Verdana"/>
               </a:rPr>
-              <a:t>Aiza</a:t>
-            </a:r>
-            <a:r>
-              <a:rPr lang="en-GB" sz="4800" dirty="0">
-                <a:latin typeface="Franklin Gothic Demi" pitchFamily="34" charset="0"/>
+              <a:t>“Aiza moa ianao ?”</a:t>
+            </a:r>
+          </a:p>
+          <a:p>
+            <a:pPr algn="ctr"/>
+            <a:r>
+              <a:rPr lang="en-US" sz="4500" b="true">
+                <a:solidFill>
+                  <a:srgbClr val="000000"/>
+                </a:solidFill>
+                <a:latin typeface="Verdana"/>
               </a:rPr>
-              <a:t> moa </a:t>
-            </a:r>
-            <a:r>
-              <a:rPr lang="en-GB" sz="4800" dirty="0" err="1">
-                <a:latin typeface="Franklin Gothic Demi" pitchFamily="34" charset="0"/>
+              <a:t>Ny sandriko no hiaro anao</a:t>
+            </a:r>
+          </a:p>
+          <a:p>
+            <a:pPr algn="ctr"/>
+            <a:r>
+              <a:rPr lang="en-US" sz="4500" b="true">
+                <a:solidFill>
+                  <a:srgbClr val="000000"/>
+                </a:solidFill>
+                <a:latin typeface="Verdana"/>
               </a:rPr>
-              <a:t>ianao</a:t>
-            </a:r>
-            <a:r>
-              <a:rPr lang="en-GB" sz="4800" dirty="0">
-                <a:latin typeface="Franklin Gothic Demi" pitchFamily="34" charset="0"/>
+              <a:t>Hisakambina anao</a:t>
+            </a:r>
+          </a:p>
+          <a:p>
+            <a:pPr algn="ctr"/>
+            <a:r>
+              <a:rPr lang="en-US" sz="4500" b="true">
+                <a:solidFill>
+                  <a:srgbClr val="000000"/>
+                </a:solidFill>
+                <a:latin typeface="Verdana"/>
               </a:rPr>
-              <a:t> ?”</a:t>
-            </a:r>
-            <a:endParaRPr lang="en-GB" sz="4800" dirty="0" smtClean="0">
-              <a:latin typeface="Franklin Gothic Demi" pitchFamily="34" charset="0"/>
-            </a:endParaRPr>
+              <a:t>“Aiza moa ianao ?”</a:t>
+            </a:r>
           </a:p>
           <a:p>
             <a:pPr algn="ctr"/>
             <a:r>
-              <a:rPr lang="en-GB" sz="4800" dirty="0">
-                <a:latin typeface="Franklin Gothic Demi" pitchFamily="34" charset="0"/>
+              <a:rPr lang="en-US" sz="4500" b="true">
+                <a:solidFill>
+                  <a:srgbClr val="000000"/>
+                </a:solidFill>
+                <a:latin typeface="Verdana"/>
               </a:rPr>
-              <a:t>       </a:t>
-            </a:r>
-            <a:r>
-              <a:rPr lang="en-GB" sz="4800" dirty="0" err="1">
-                <a:latin typeface="Franklin Gothic Demi" pitchFamily="34" charset="0"/>
+              <a:t>Raha ny Fanahy</a:t>
+            </a:r>
+          </a:p>
+          <a:p>
+            <a:pPr algn="ctr"/>
+            <a:r>
+              <a:rPr lang="en-US" sz="4500" b="true">
+                <a:solidFill>
+                  <a:srgbClr val="000000"/>
+                </a:solidFill>
+                <a:latin typeface="Verdana"/>
               </a:rPr>
-              <a:t>Raha</a:t>
-            </a:r>
-            <a:r>
-              <a:rPr lang="en-GB" sz="4800" dirty="0">
-                <a:latin typeface="Franklin Gothic Demi" pitchFamily="34" charset="0"/>
+              <a:t>no hitantana anao</a:t>
+            </a:r>
+          </a:p>
+          <a:p>
+            <a:pPr algn="ctr"/>
+            <a:r>
+              <a:rPr lang="en-US" sz="4500" b="true">
+                <a:solidFill>
+                  <a:srgbClr val="000000"/>
+                </a:solidFill>
+                <a:latin typeface="Verdana"/>
               </a:rPr>
-              <a:t> </a:t>
-            </a:r>
-            <a:r>
-              <a:rPr lang="en-GB" sz="4800" dirty="0" err="1">
-                <a:latin typeface="Franklin Gothic Demi" pitchFamily="34" charset="0"/>
+              <a:t>Vonona ve ianao ?</a:t>
+            </a:r>
+          </a:p>
+          <a:p>
+            <a:pPr algn="ctr"/>
+            <a:r>
+              <a:rPr lang="en-US" sz="4500" b="true">
+                <a:solidFill>
+                  <a:srgbClr val="000000"/>
+                </a:solidFill>
+                <a:latin typeface="Verdana"/>
               </a:rPr>
-              <a:t>ny</a:t>
-            </a:r>
-            <a:r>
-              <a:rPr lang="en-GB" sz="4800" dirty="0">
-                <a:latin typeface="Franklin Gothic Demi" pitchFamily="34" charset="0"/>
-              </a:rPr>
-              <a:t> </a:t>
-            </a:r>
-            <a:r>
-              <a:rPr lang="en-GB" sz="4800" dirty="0" err="1">
-                <a:latin typeface="Franklin Gothic Demi" pitchFamily="34" charset="0"/>
-              </a:rPr>
-              <a:t>Fanahy</a:t>
-            </a:r>
-            <a:r>
-              <a:rPr lang="en-GB" sz="4800" dirty="0">
-                <a:latin typeface="Franklin Gothic Demi" pitchFamily="34" charset="0"/>
-              </a:rPr>
-              <a:t> </a:t>
-            </a:r>
-            <a:endParaRPr lang="en-GB" sz="4800" dirty="0" smtClean="0">
-              <a:latin typeface="Franklin Gothic Demi" pitchFamily="34" charset="0"/>
-            </a:endParaRPr>
-          </a:p>
-          <a:p>
-            <a:pPr algn="ctr"/>
-            <a:r>
-              <a:rPr lang="en-GB" sz="4800" dirty="0">
-                <a:latin typeface="Franklin Gothic Demi" pitchFamily="34" charset="0"/>
-              </a:rPr>
-              <a:t>           no </a:t>
-            </a:r>
-            <a:r>
-              <a:rPr lang="en-GB" sz="4800" dirty="0" err="1">
-                <a:latin typeface="Franklin Gothic Demi" pitchFamily="34" charset="0"/>
-              </a:rPr>
-              <a:t>hitantana</a:t>
-            </a:r>
-            <a:r>
-              <a:rPr lang="en-GB" sz="4800" dirty="0">
-                <a:latin typeface="Franklin Gothic Demi" pitchFamily="34" charset="0"/>
-              </a:rPr>
-              <a:t> </a:t>
-            </a:r>
-            <a:r>
-              <a:rPr lang="en-GB" sz="4800" dirty="0" err="1">
-                <a:latin typeface="Franklin Gothic Demi" pitchFamily="34" charset="0"/>
-              </a:rPr>
-              <a:t>anao</a:t>
-            </a:r>
-            <a:endParaRPr lang="en-GB" sz="4800" dirty="0" smtClean="0">
-              <a:latin typeface="Franklin Gothic Demi" pitchFamily="34" charset="0"/>
-            </a:endParaRPr>
-          </a:p>
-          <a:p>
-            <a:pPr algn="ctr"/>
-            <a:r>
-              <a:rPr lang="en-GB" sz="4800" dirty="0">
-                <a:latin typeface="Franklin Gothic Demi" pitchFamily="34" charset="0"/>
-              </a:rPr>
-              <a:t>     </a:t>
-            </a:r>
-            <a:r>
-              <a:rPr lang="en-GB" sz="4800" dirty="0" err="1">
-                <a:latin typeface="Franklin Gothic Demi" pitchFamily="34" charset="0"/>
-              </a:rPr>
-              <a:t>Vonona</a:t>
-            </a:r>
-            <a:r>
-              <a:rPr lang="en-GB" sz="4800" dirty="0">
-                <a:latin typeface="Franklin Gothic Demi" pitchFamily="34" charset="0"/>
-              </a:rPr>
-              <a:t> </a:t>
-            </a:r>
-            <a:r>
-              <a:rPr lang="en-GB" sz="4800" dirty="0" err="1">
-                <a:latin typeface="Franklin Gothic Demi" pitchFamily="34" charset="0"/>
-              </a:rPr>
-              <a:t>ve</a:t>
-            </a:r>
-            <a:r>
-              <a:rPr lang="en-GB" sz="4800" dirty="0">
-                <a:latin typeface="Franklin Gothic Demi" pitchFamily="34" charset="0"/>
-              </a:rPr>
-              <a:t> </a:t>
-            </a:r>
-            <a:r>
-              <a:rPr lang="en-GB" sz="4800" dirty="0" err="1">
-                <a:latin typeface="Franklin Gothic Demi" pitchFamily="34" charset="0"/>
-              </a:rPr>
-              <a:t>ianao</a:t>
-            </a:r>
-            <a:r>
-              <a:rPr lang="en-GB" sz="4800" dirty="0">
-                <a:latin typeface="Franklin Gothic Demi" pitchFamily="34" charset="0"/>
-              </a:rPr>
-              <a:t> ?</a:t>
-            </a:r>
-            <a:endParaRPr lang="en-GB" sz="4800" dirty="0" smtClean="0">
-              <a:latin typeface="Franklin Gothic Demi" pitchFamily="34" charset="0"/>
-            </a:endParaRPr>
-          </a:p>
-          <a:p>
-            <a:pPr algn="ctr"/>
-            <a:r>
-              <a:rPr lang="en-GB" sz="4800" dirty="0">
-                <a:latin typeface="Franklin Gothic Demi" pitchFamily="34" charset="0"/>
-              </a:rPr>
-              <a:t>           “</a:t>
-            </a:r>
-            <a:r>
-              <a:rPr lang="en-GB" sz="4800" dirty="0" err="1">
-                <a:latin typeface="Franklin Gothic Demi" pitchFamily="34" charset="0"/>
-              </a:rPr>
-              <a:t>Aiza</a:t>
-            </a:r>
-            <a:r>
-              <a:rPr lang="en-GB" sz="4800" dirty="0">
-                <a:latin typeface="Franklin Gothic Demi" pitchFamily="34" charset="0"/>
-              </a:rPr>
-              <a:t> moa </a:t>
-            </a:r>
-            <a:r>
-              <a:rPr lang="en-GB" sz="4800" dirty="0" err="1">
-                <a:latin typeface="Franklin Gothic Demi" pitchFamily="34" charset="0"/>
-              </a:rPr>
-              <a:t>ianao</a:t>
-            </a:r>
-            <a:r>
-              <a:rPr lang="en-GB" sz="4800" dirty="0">
-                <a:latin typeface="Franklin Gothic Demi" pitchFamily="34" charset="0"/>
-              </a:rPr>
-              <a:t> ?”</a:t>
+              <a:t>“Aiza moa ianao ?”</a:t>
             </a:r>
           </a:p>
         </p:txBody>
       </p:sp>
     </p:spTree>
-    <p:extLst>
-      <p:ext uri="{BB962C8B-B14F-4D97-AF65-F5344CB8AC3E}">
-        <p14:creationId xmlns:p14="http://schemas.microsoft.com/office/powerpoint/2010/main" val="1381672790"/>
-      </p:ext>
-    </p:extLst>
   </p:cSld>
   <p:clrMapOvr>
     <a:masterClrMapping/>
@@ -5340,7 +3842,7 @@
 </file>
 
 <file path=ppt/theme/theme1.xml><?xml version="1.0" encoding="utf-8"?>
-<a:theme xmlns:a="http://schemas.openxmlformats.org/drawingml/2006/main" name="Thème Office">
+<a:theme xmlns:a="http://schemas.openxmlformats.org/drawingml/2006/main" name="Office Theme">
   <a:themeElements>
     <a:clrScheme name="Office">
       <a:dk1>
@@ -5414,7 +3916,6 @@
         <a:font script="Mong" typeface="Mongolian Baiti"/>
         <a:font script="Viet" typeface="Times New Roman"/>
         <a:font script="Uigh" typeface="Microsoft Uighur"/>
-        <a:font script="Geor" typeface="Sylfaen"/>
       </a:majorFont>
       <a:minorFont>
         <a:latin typeface="Calibri"/>
@@ -5449,7 +3950,6 @@
         <a:font script="Mong" typeface="Mongolian Baiti"/>
         <a:font script="Viet" typeface="Arial"/>
         <a:font script="Uigh" typeface="Microsoft Uighur"/>
-        <a:font script="Geor" typeface="Sylfaen"/>
       </a:minorFont>
     </a:fontScheme>
     <a:fmtScheme name="Office">
